--- a/AI Champions Bootcamp! Capstone project_1 of 2_Lim Chee Kuen (Danny)_1998459F_May 2026.pptx
+++ b/AI Champions Bootcamp! Capstone project_1 of 2_Lim Chee Kuen (Danny)_1998459F_May 2026.pptx
@@ -4,6 +4,9 @@
   <p:sldMasterIdLst>
     <p:sldMasterId id="2147483648" r:id="rId1"/>
   </p:sldMasterIdLst>
+  <p:notesMasterIdLst>
+    <p:notesMasterId r:id="rId14"/>
+  </p:notesMasterIdLst>
   <p:sldIdLst>
     <p:sldId id="256" r:id="rId2"/>
     <p:sldId id="265" r:id="rId3"/>
@@ -16,6 +19,7 @@
     <p:sldId id="262" r:id="rId10"/>
     <p:sldId id="263" r:id="rId11"/>
     <p:sldId id="264" r:id="rId12"/>
+    <p:sldId id="267" r:id="rId13"/>
   </p:sldIdLst>
   <p:sldSz cx="12192000" cy="6858000"/>
   <p:notesSz cx="6858000" cy="9144000"/>
@@ -133,6 +137,356 @@
 </p:presentation>
 </file>
 
+<file path=ppt/notesMasters/notesMaster1.xml><?xml version="1.0" encoding="utf-8"?>
+<p:notesMaster xmlns:a="http://schemas.openxmlformats.org/drawingml/2006/main" xmlns:r="http://schemas.openxmlformats.org/officeDocument/2006/relationships" xmlns:p="http://schemas.openxmlformats.org/presentationml/2006/main">
+  <p:cSld>
+    <p:bg>
+      <p:bgRef idx="1001">
+        <a:schemeClr val="bg1"/>
+      </p:bgRef>
+    </p:bg>
+    <p:spTree>
+      <p:nvGrpSpPr>
+        <p:cNvPr id="1" name=""/>
+        <p:cNvGrpSpPr/>
+        <p:nvPr/>
+      </p:nvGrpSpPr>
+      <p:grpSpPr>
+        <a:xfrm>
+          <a:off x="0" y="0"/>
+          <a:ext cx="0" cy="0"/>
+          <a:chOff x="0" y="0"/>
+          <a:chExt cx="0" cy="0"/>
+        </a:xfrm>
+      </p:grpSpPr>
+      <p:sp>
+        <p:nvSpPr>
+          <p:cNvPr id="2" name="Header Placeholder 1"/>
+          <p:cNvSpPr>
+            <a:spLocks noGrp="1"/>
+          </p:cNvSpPr>
+          <p:nvPr>
+            <p:ph type="hdr" sz="quarter"/>
+          </p:nvPr>
+        </p:nvSpPr>
+        <p:spPr>
+          <a:xfrm>
+            <a:off x="0" y="0"/>
+            <a:ext cx="2971800" cy="458788"/>
+          </a:xfrm>
+          <a:prstGeom prst="rect">
+            <a:avLst/>
+          </a:prstGeom>
+        </p:spPr>
+        <p:txBody>
+          <a:bodyPr vert="horz" lIns="91440" tIns="45720" rIns="91440" bIns="45720" rtlCol="0"/>
+          <a:lstStyle>
+            <a:lvl1pPr algn="l">
+              <a:defRPr sz="1200"/>
+            </a:lvl1pPr>
+          </a:lstStyle>
+          <a:p>
+            <a:endParaRPr lang="en-SG"/>
+          </a:p>
+        </p:txBody>
+      </p:sp>
+      <p:sp>
+        <p:nvSpPr>
+          <p:cNvPr id="3" name="Date Placeholder 2"/>
+          <p:cNvSpPr>
+            <a:spLocks noGrp="1"/>
+          </p:cNvSpPr>
+          <p:nvPr>
+            <p:ph type="dt" idx="1"/>
+          </p:nvPr>
+        </p:nvSpPr>
+        <p:spPr>
+          <a:xfrm>
+            <a:off x="3884613" y="0"/>
+            <a:ext cx="2971800" cy="458788"/>
+          </a:xfrm>
+          <a:prstGeom prst="rect">
+            <a:avLst/>
+          </a:prstGeom>
+        </p:spPr>
+        <p:txBody>
+          <a:bodyPr vert="horz" lIns="91440" tIns="45720" rIns="91440" bIns="45720" rtlCol="0"/>
+          <a:lstStyle>
+            <a:lvl1pPr algn="r">
+              <a:defRPr sz="1200"/>
+            </a:lvl1pPr>
+          </a:lstStyle>
+          <a:p>
+            <a:fld id="{23318710-71B7-4E59-959A-920B16E90FC0}" type="datetimeFigureOut">
+              <a:rPr lang="en-SG" smtClean="0"/>
+              <a:t>10/7/2026</a:t>
+            </a:fld>
+            <a:endParaRPr lang="en-SG"/>
+          </a:p>
+        </p:txBody>
+      </p:sp>
+      <p:sp>
+        <p:nvSpPr>
+          <p:cNvPr id="4" name="Slide Image Placeholder 3"/>
+          <p:cNvSpPr>
+            <a:spLocks noGrp="1" noRot="1" noChangeAspect="1"/>
+          </p:cNvSpPr>
+          <p:nvPr>
+            <p:ph type="sldImg" idx="2"/>
+          </p:nvPr>
+        </p:nvSpPr>
+        <p:spPr>
+          <a:xfrm>
+            <a:off x="685800" y="1143000"/>
+            <a:ext cx="5486400" cy="3086100"/>
+          </a:xfrm>
+          <a:prstGeom prst="rect">
+            <a:avLst/>
+          </a:prstGeom>
+          <a:noFill/>
+          <a:ln w="12700">
+            <a:solidFill>
+              <a:prstClr val="black"/>
+            </a:solidFill>
+          </a:ln>
+        </p:spPr>
+        <p:txBody>
+          <a:bodyPr vert="horz" lIns="91440" tIns="45720" rIns="91440" bIns="45720" rtlCol="0" anchor="ctr"/>
+          <a:lstStyle/>
+          <a:p>
+            <a:endParaRPr lang="en-SG"/>
+          </a:p>
+        </p:txBody>
+      </p:sp>
+      <p:sp>
+        <p:nvSpPr>
+          <p:cNvPr id="5" name="Notes Placeholder 4"/>
+          <p:cNvSpPr>
+            <a:spLocks noGrp="1"/>
+          </p:cNvSpPr>
+          <p:nvPr>
+            <p:ph type="body" sz="quarter" idx="3"/>
+          </p:nvPr>
+        </p:nvSpPr>
+        <p:spPr>
+          <a:xfrm>
+            <a:off x="685800" y="4400550"/>
+            <a:ext cx="5486400" cy="3600450"/>
+          </a:xfrm>
+          <a:prstGeom prst="rect">
+            <a:avLst/>
+          </a:prstGeom>
+        </p:spPr>
+        <p:txBody>
+          <a:bodyPr vert="horz" lIns="91440" tIns="45720" rIns="91440" bIns="45720" rtlCol="0"/>
+          <a:lstStyle/>
+          <a:p>
+            <a:pPr lvl="0"/>
+            <a:r>
+              <a:rPr lang="en-US"/>
+              <a:t>Click to edit Master text styles</a:t>
+            </a:r>
+          </a:p>
+          <a:p>
+            <a:pPr lvl="1"/>
+            <a:r>
+              <a:rPr lang="en-US"/>
+              <a:t>Second level</a:t>
+            </a:r>
+          </a:p>
+          <a:p>
+            <a:pPr lvl="2"/>
+            <a:r>
+              <a:rPr lang="en-US"/>
+              <a:t>Third level</a:t>
+            </a:r>
+          </a:p>
+          <a:p>
+            <a:pPr lvl="3"/>
+            <a:r>
+              <a:rPr lang="en-US"/>
+              <a:t>Fourth level</a:t>
+            </a:r>
+          </a:p>
+          <a:p>
+            <a:pPr lvl="4"/>
+            <a:r>
+              <a:rPr lang="en-US"/>
+              <a:t>Fifth level</a:t>
+            </a:r>
+            <a:endParaRPr lang="en-SG"/>
+          </a:p>
+        </p:txBody>
+      </p:sp>
+      <p:sp>
+        <p:nvSpPr>
+          <p:cNvPr id="6" name="Footer Placeholder 5"/>
+          <p:cNvSpPr>
+            <a:spLocks noGrp="1"/>
+          </p:cNvSpPr>
+          <p:nvPr>
+            <p:ph type="ftr" sz="quarter" idx="4"/>
+          </p:nvPr>
+        </p:nvSpPr>
+        <p:spPr>
+          <a:xfrm>
+            <a:off x="0" y="8685213"/>
+            <a:ext cx="2971800" cy="458787"/>
+          </a:xfrm>
+          <a:prstGeom prst="rect">
+            <a:avLst/>
+          </a:prstGeom>
+        </p:spPr>
+        <p:txBody>
+          <a:bodyPr vert="horz" lIns="91440" tIns="45720" rIns="91440" bIns="45720" rtlCol="0" anchor="b"/>
+          <a:lstStyle>
+            <a:lvl1pPr algn="l">
+              <a:defRPr sz="1200"/>
+            </a:lvl1pPr>
+          </a:lstStyle>
+          <a:p>
+            <a:endParaRPr lang="en-SG"/>
+          </a:p>
+        </p:txBody>
+      </p:sp>
+      <p:sp>
+        <p:nvSpPr>
+          <p:cNvPr id="7" name="Slide Number Placeholder 6"/>
+          <p:cNvSpPr>
+            <a:spLocks noGrp="1"/>
+          </p:cNvSpPr>
+          <p:nvPr>
+            <p:ph type="sldNum" sz="quarter" idx="5"/>
+          </p:nvPr>
+        </p:nvSpPr>
+        <p:spPr>
+          <a:xfrm>
+            <a:off x="3884613" y="8685213"/>
+            <a:ext cx="2971800" cy="458787"/>
+          </a:xfrm>
+          <a:prstGeom prst="rect">
+            <a:avLst/>
+          </a:prstGeom>
+        </p:spPr>
+        <p:txBody>
+          <a:bodyPr vert="horz" lIns="91440" tIns="45720" rIns="91440" bIns="45720" rtlCol="0" anchor="b"/>
+          <a:lstStyle>
+            <a:lvl1pPr algn="r">
+              <a:defRPr sz="1200"/>
+            </a:lvl1pPr>
+          </a:lstStyle>
+          <a:p>
+            <a:fld id="{487459D5-9111-4F9A-8B9D-2AAE5751AC1C}" type="slidenum">
+              <a:rPr lang="en-SG" smtClean="0"/>
+              <a:t>‹#›</a:t>
+            </a:fld>
+            <a:endParaRPr lang="en-SG"/>
+          </a:p>
+        </p:txBody>
+      </p:sp>
+    </p:spTree>
+    <p:extLst>
+      <p:ext uri="{BB962C8B-B14F-4D97-AF65-F5344CB8AC3E}">
+        <p14:creationId xmlns:p14="http://schemas.microsoft.com/office/powerpoint/2010/main" val="1031867117"/>
+      </p:ext>
+    </p:extLst>
+  </p:cSld>
+  <p:clrMap bg1="lt1" tx1="dk1" bg2="lt2" tx2="dk2" accent1="accent1" accent2="accent2" accent3="accent3" accent4="accent4" accent5="accent5" accent6="accent6" hlink="hlink" folHlink="folHlink"/>
+  <p:notesStyle>
+    <a:lvl1pPr marL="0" algn="l" defTabSz="914400" rtl="0" eaLnBrk="1" latinLnBrk="0" hangingPunct="1">
+      <a:defRPr sz="1200" kern="1200">
+        <a:solidFill>
+          <a:schemeClr val="tx1"/>
+        </a:solidFill>
+        <a:latin typeface="+mn-lt"/>
+        <a:ea typeface="+mn-ea"/>
+        <a:cs typeface="+mn-cs"/>
+      </a:defRPr>
+    </a:lvl1pPr>
+    <a:lvl2pPr marL="457200" algn="l" defTabSz="914400" rtl="0" eaLnBrk="1" latinLnBrk="0" hangingPunct="1">
+      <a:defRPr sz="1200" kern="1200">
+        <a:solidFill>
+          <a:schemeClr val="tx1"/>
+        </a:solidFill>
+        <a:latin typeface="+mn-lt"/>
+        <a:ea typeface="+mn-ea"/>
+        <a:cs typeface="+mn-cs"/>
+      </a:defRPr>
+    </a:lvl2pPr>
+    <a:lvl3pPr marL="914400" algn="l" defTabSz="914400" rtl="0" eaLnBrk="1" latinLnBrk="0" hangingPunct="1">
+      <a:defRPr sz="1200" kern="1200">
+        <a:solidFill>
+          <a:schemeClr val="tx1"/>
+        </a:solidFill>
+        <a:latin typeface="+mn-lt"/>
+        <a:ea typeface="+mn-ea"/>
+        <a:cs typeface="+mn-cs"/>
+      </a:defRPr>
+    </a:lvl3pPr>
+    <a:lvl4pPr marL="1371600" algn="l" defTabSz="914400" rtl="0" eaLnBrk="1" latinLnBrk="0" hangingPunct="1">
+      <a:defRPr sz="1200" kern="1200">
+        <a:solidFill>
+          <a:schemeClr val="tx1"/>
+        </a:solidFill>
+        <a:latin typeface="+mn-lt"/>
+        <a:ea typeface="+mn-ea"/>
+        <a:cs typeface="+mn-cs"/>
+      </a:defRPr>
+    </a:lvl4pPr>
+    <a:lvl5pPr marL="1828800" algn="l" defTabSz="914400" rtl="0" eaLnBrk="1" latinLnBrk="0" hangingPunct="1">
+      <a:defRPr sz="1200" kern="1200">
+        <a:solidFill>
+          <a:schemeClr val="tx1"/>
+        </a:solidFill>
+        <a:latin typeface="+mn-lt"/>
+        <a:ea typeface="+mn-ea"/>
+        <a:cs typeface="+mn-cs"/>
+      </a:defRPr>
+    </a:lvl5pPr>
+    <a:lvl6pPr marL="2286000" algn="l" defTabSz="914400" rtl="0" eaLnBrk="1" latinLnBrk="0" hangingPunct="1">
+      <a:defRPr sz="1200" kern="1200">
+        <a:solidFill>
+          <a:schemeClr val="tx1"/>
+        </a:solidFill>
+        <a:latin typeface="+mn-lt"/>
+        <a:ea typeface="+mn-ea"/>
+        <a:cs typeface="+mn-cs"/>
+      </a:defRPr>
+    </a:lvl6pPr>
+    <a:lvl7pPr marL="2743200" algn="l" defTabSz="914400" rtl="0" eaLnBrk="1" latinLnBrk="0" hangingPunct="1">
+      <a:defRPr sz="1200" kern="1200">
+        <a:solidFill>
+          <a:schemeClr val="tx1"/>
+        </a:solidFill>
+        <a:latin typeface="+mn-lt"/>
+        <a:ea typeface="+mn-ea"/>
+        <a:cs typeface="+mn-cs"/>
+      </a:defRPr>
+    </a:lvl7pPr>
+    <a:lvl8pPr marL="3200400" algn="l" defTabSz="914400" rtl="0" eaLnBrk="1" latinLnBrk="0" hangingPunct="1">
+      <a:defRPr sz="1200" kern="1200">
+        <a:solidFill>
+          <a:schemeClr val="tx1"/>
+        </a:solidFill>
+        <a:latin typeface="+mn-lt"/>
+        <a:ea typeface="+mn-ea"/>
+        <a:cs typeface="+mn-cs"/>
+      </a:defRPr>
+    </a:lvl8pPr>
+    <a:lvl9pPr marL="3657600" algn="l" defTabSz="914400" rtl="0" eaLnBrk="1" latinLnBrk="0" hangingPunct="1">
+      <a:defRPr sz="1200" kern="1200">
+        <a:solidFill>
+          <a:schemeClr val="tx1"/>
+        </a:solidFill>
+        <a:latin typeface="+mn-lt"/>
+        <a:ea typeface="+mn-ea"/>
+        <a:cs typeface="+mn-cs"/>
+      </a:defRPr>
+    </a:lvl9pPr>
+  </p:notesStyle>
+</p:notesMaster>
+</file>
+
 <file path=ppt/slideLayouts/slideLayout1.xml><?xml version="1.0" encoding="utf-8"?>
 <p:sldLayout xmlns:a="http://schemas.openxmlformats.org/drawingml/2006/main" xmlns:r="http://schemas.openxmlformats.org/officeDocument/2006/relationships" xmlns:p="http://schemas.openxmlformats.org/presentationml/2006/main" type="title" preserve="1">
   <p:cSld name="Title Slide">
@@ -312,7 +666,7 @@
           <a:p>
             <a:fld id="{5BCAD085-E8A6-8845-BD4E-CB4CCA059FC4}" type="datetimeFigureOut">
               <a:rPr lang="en-US" smtClean="0"/>
-              <a:t>5/28/2026</a:t>
+              <a:t>7/10/2026</a:t>
             </a:fld>
             <a:endParaRPr lang="en-US"/>
           </a:p>
@@ -480,7 +834,7 @@
           <a:p>
             <a:fld id="{5BCAD085-E8A6-8845-BD4E-CB4CCA059FC4}" type="datetimeFigureOut">
               <a:rPr lang="en-US" smtClean="0"/>
-              <a:t>5/28/2026</a:t>
+              <a:t>7/10/2026</a:t>
             </a:fld>
             <a:endParaRPr lang="en-US"/>
           </a:p>
@@ -658,7 +1012,7 @@
           <a:p>
             <a:fld id="{5BCAD085-E8A6-8845-BD4E-CB4CCA059FC4}" type="datetimeFigureOut">
               <a:rPr lang="en-US" smtClean="0"/>
-              <a:t>5/28/2026</a:t>
+              <a:t>7/10/2026</a:t>
             </a:fld>
             <a:endParaRPr lang="en-US"/>
           </a:p>
@@ -826,7 +1180,7 @@
           <a:p>
             <a:fld id="{5BCAD085-E8A6-8845-BD4E-CB4CCA059FC4}" type="datetimeFigureOut">
               <a:rPr lang="en-US" smtClean="0"/>
-              <a:t>5/28/2026</a:t>
+              <a:t>7/10/2026</a:t>
             </a:fld>
             <a:endParaRPr lang="en-US"/>
           </a:p>
@@ -1071,7 +1425,7 @@
           <a:p>
             <a:fld id="{5BCAD085-E8A6-8845-BD4E-CB4CCA059FC4}" type="datetimeFigureOut">
               <a:rPr lang="en-US" smtClean="0"/>
-              <a:t>5/28/2026</a:t>
+              <a:t>7/10/2026</a:t>
             </a:fld>
             <a:endParaRPr lang="en-US"/>
           </a:p>
@@ -1356,7 +1710,7 @@
           <a:p>
             <a:fld id="{5BCAD085-E8A6-8845-BD4E-CB4CCA059FC4}" type="datetimeFigureOut">
               <a:rPr lang="en-US" smtClean="0"/>
-              <a:t>5/28/2026</a:t>
+              <a:t>7/10/2026</a:t>
             </a:fld>
             <a:endParaRPr lang="en-US"/>
           </a:p>
@@ -1775,7 +2129,7 @@
           <a:p>
             <a:fld id="{5BCAD085-E8A6-8845-BD4E-CB4CCA059FC4}" type="datetimeFigureOut">
               <a:rPr lang="en-US" smtClean="0"/>
-              <a:t>5/28/2026</a:t>
+              <a:t>7/10/2026</a:t>
             </a:fld>
             <a:endParaRPr lang="en-US"/>
           </a:p>
@@ -1892,7 +2246,7 @@
           <a:p>
             <a:fld id="{5BCAD085-E8A6-8845-BD4E-CB4CCA059FC4}" type="datetimeFigureOut">
               <a:rPr lang="en-US" smtClean="0"/>
-              <a:t>5/28/2026</a:t>
+              <a:t>7/10/2026</a:t>
             </a:fld>
             <a:endParaRPr lang="en-US"/>
           </a:p>
@@ -1987,7 +2341,7 @@
           <a:p>
             <a:fld id="{5BCAD085-E8A6-8845-BD4E-CB4CCA059FC4}" type="datetimeFigureOut">
               <a:rPr lang="en-US" smtClean="0"/>
-              <a:t>5/28/2026</a:t>
+              <a:t>7/10/2026</a:t>
             </a:fld>
             <a:endParaRPr lang="en-US"/>
           </a:p>
@@ -2262,7 +2616,7 @@
           <a:p>
             <a:fld id="{5BCAD085-E8A6-8845-BD4E-CB4CCA059FC4}" type="datetimeFigureOut">
               <a:rPr lang="en-US" smtClean="0"/>
-              <a:t>5/28/2026</a:t>
+              <a:t>7/10/2026</a:t>
             </a:fld>
             <a:endParaRPr lang="en-US"/>
           </a:p>
@@ -2514,7 +2868,7 @@
           <a:p>
             <a:fld id="{5BCAD085-E8A6-8845-BD4E-CB4CCA059FC4}" type="datetimeFigureOut">
               <a:rPr lang="en-US" smtClean="0"/>
-              <a:t>5/28/2026</a:t>
+              <a:t>7/10/2026</a:t>
             </a:fld>
             <a:endParaRPr lang="en-US"/>
           </a:p>
@@ -2725,7 +3079,7 @@
           <a:p>
             <a:fld id="{5BCAD085-E8A6-8845-BD4E-CB4CCA059FC4}" type="datetimeFigureOut">
               <a:rPr lang="en-US" smtClean="0"/>
-              <a:t>5/28/2026</a:t>
+              <a:t>7/10/2026</a:t>
             </a:fld>
             <a:endParaRPr lang="en-US"/>
           </a:p>
@@ -3153,7 +3507,7 @@
         <p:spPr>
           <a:xfrm>
             <a:off x="914400" y="1828800"/>
-            <a:ext cx="10755984" cy="467820"/>
+            <a:ext cx="10755984" cy="898708"/>
           </a:xfrm>
           <a:prstGeom prst="rect">
             <a:avLst/>
@@ -3166,7 +3520,6 @@
           </a:bodyPr>
           <a:lstStyle/>
           <a:p>
-            <a:pPr algn="l"/>
             <a:r>
               <a:rPr lang="en-SG" sz="2800" b="1" dirty="0">
                 <a:solidFill>
@@ -3174,7 +3527,15 @@
                 </a:solidFill>
                 <a:latin typeface="Calibri"/>
               </a:rPr>
-              <a:t>Improve productivity of resource matching for Social Assistance Officers</a:t>
+              <a:t>Improve productivity of Social Assistance Officers</a:t>
+            </a:r>
+            <a:r>
+              <a:rPr lang="en-SG" sz="2800" b="1" dirty="0">
+                <a:solidFill>
+                  <a:srgbClr val="FFFFFF"/>
+                </a:solidFill>
+              </a:rPr>
+              <a:t> in identifying relevant welfare resources of needy citizens</a:t>
             </a:r>
             <a:endParaRPr sz="2800" b="1" dirty="0">
               <a:solidFill>
@@ -4827,6 +5188,2737 @@
 </p:sld>
 </file>
 
+<file path=ppt/slides/slide12.xml><?xml version="1.0" encoding="utf-8"?>
+<p:sld xmlns:a="http://schemas.openxmlformats.org/drawingml/2006/main" xmlns:r="http://schemas.openxmlformats.org/officeDocument/2006/relationships" xmlns:p="http://schemas.openxmlformats.org/presentationml/2006/main">
+  <p:cSld>
+    <p:spTree>
+      <p:nvGrpSpPr>
+        <p:cNvPr id="1" name=""/>
+        <p:cNvGrpSpPr/>
+        <p:nvPr/>
+      </p:nvGrpSpPr>
+      <p:grpSpPr>
+        <a:xfrm>
+          <a:off x="0" y="0"/>
+          <a:ext cx="0" cy="0"/>
+          <a:chOff x="0" y="0"/>
+          <a:chExt cx="0" cy="0"/>
+        </a:xfrm>
+      </p:grpSpPr>
+      <p:sp>
+        <p:nvSpPr>
+          <p:cNvPr id="2" name="TextBox 1"/>
+          <p:cNvSpPr txBox="1"/>
+          <p:nvPr/>
+        </p:nvSpPr>
+        <p:spPr>
+          <a:xfrm>
+            <a:off x="457200" y="182880"/>
+            <a:ext cx="11277600" cy="457200"/>
+          </a:xfrm>
+          <a:prstGeom prst="rect">
+            <a:avLst/>
+          </a:prstGeom>
+          <a:noFill/>
+        </p:spPr>
+        <p:txBody>
+          <a:bodyPr wrap="square" lIns="36576" tIns="18288" rIns="36576" bIns="18288" anchor="t">
+            <a:spAutoFit/>
+          </a:bodyPr>
+          <a:lstStyle/>
+          <a:p>
+            <a:pPr algn="l"/>
+            <a:r>
+              <a:rPr sz="2200" b="1" i="0">
+                <a:solidFill>
+                  <a:srgbClr val="1F2A44"/>
+                </a:solidFill>
+              </a:rPr>
+              <a:t>15 Agents — Deep Analysis Mode · CrewAI Hierarchical Crew  (Topic 5.5)</a:t>
+            </a:r>
+          </a:p>
+        </p:txBody>
+      </p:sp>
+      <p:sp>
+        <p:nvSpPr>
+          <p:cNvPr id="3" name="TextBox 2"/>
+          <p:cNvSpPr txBox="1"/>
+          <p:nvPr/>
+        </p:nvSpPr>
+        <p:spPr>
+          <a:xfrm>
+            <a:off x="457200" y="658368"/>
+            <a:ext cx="11277600" cy="274320"/>
+          </a:xfrm>
+          <a:prstGeom prst="rect">
+            <a:avLst/>
+          </a:prstGeom>
+          <a:noFill/>
+        </p:spPr>
+        <p:txBody>
+          <a:bodyPr wrap="square" lIns="36576" tIns="18288" rIns="36576" bIns="18288" anchor="t">
+            <a:spAutoFit/>
+          </a:bodyPr>
+          <a:lstStyle/>
+          <a:p>
+            <a:pPr algn="l"/>
+            <a:r>
+              <a:rPr sz="1100" b="0" i="0">
+                <a:solidFill>
+                  <a:srgbClr val="6B7280"/>
+                </a:solidFill>
+              </a:rPr>
+              <a:t>Opt-in multi-agent crew alongside fast single-shot RAG. Mirrors MSF multidisciplinary case-conference practice.</a:t>
+            </a:r>
+          </a:p>
+        </p:txBody>
+      </p:sp>
+      <p:sp>
+        <p:nvSpPr>
+          <p:cNvPr id="4" name="Rounded Rectangle 3"/>
+          <p:cNvSpPr/>
+          <p:nvPr/>
+        </p:nvSpPr>
+        <p:spPr>
+          <a:xfrm>
+            <a:off x="4724400" y="1005840"/>
+            <a:ext cx="2743200" cy="347472"/>
+          </a:xfrm>
+          <a:prstGeom prst="roundRect">
+            <a:avLst/>
+          </a:prstGeom>
+          <a:solidFill>
+            <a:srgbClr val="F3F4F6"/>
+          </a:solidFill>
+          <a:ln w="15875">
+            <a:solidFill>
+              <a:srgbClr val="6B7280"/>
+            </a:solidFill>
+          </a:ln>
+          <a:effectLst/>
+        </p:spPr>
+        <p:style>
+          <a:lnRef idx="1">
+            <a:schemeClr val="accent1"/>
+          </a:lnRef>
+          <a:fillRef idx="3">
+            <a:schemeClr val="accent1"/>
+          </a:fillRef>
+          <a:effectRef idx="2">
+            <a:schemeClr val="accent1"/>
+          </a:effectRef>
+          <a:fontRef idx="minor">
+            <a:schemeClr val="lt1"/>
+          </a:fontRef>
+        </p:style>
+        <p:txBody>
+          <a:bodyPr wrap="square" lIns="36576" tIns="18288" rIns="36576" bIns="18288" rtlCol="0" anchor="ctr"/>
+          <a:lstStyle/>
+          <a:p>
+            <a:pPr algn="ctr"/>
+            <a:r>
+              <a:rPr sz="1000" b="1" i="0">
+                <a:solidFill>
+                  <a:srgbClr val="111827"/>
+                </a:solidFill>
+              </a:rPr>
+              <a:t>SAO interview note</a:t>
+            </a:r>
+          </a:p>
+        </p:txBody>
+      </p:sp>
+      <p:cxnSp>
+        <p:nvCxnSpPr>
+          <p:cNvPr id="5" name="Connector 4"/>
+          <p:cNvCxnSpPr/>
+          <p:nvPr/>
+        </p:nvCxnSpPr>
+        <p:spPr>
+          <a:xfrm>
+            <a:off x="6096000" y="1353312"/>
+            <a:ext cx="0" cy="109728"/>
+          </a:xfrm>
+          <a:prstGeom prst="line">
+            <a:avLst/>
+          </a:prstGeom>
+          <a:ln w="19050">
+            <a:solidFill>
+              <a:srgbClr val="4B5563"/>
+            </a:solidFill>
+            <a:tailEnd type="triangle" w="med" len="med"/>
+          </a:ln>
+        </p:spPr>
+        <p:style>
+          <a:lnRef idx="2">
+            <a:schemeClr val="accent1"/>
+          </a:lnRef>
+          <a:fillRef idx="0">
+            <a:schemeClr val="accent1"/>
+          </a:fillRef>
+          <a:effectRef idx="1">
+            <a:schemeClr val="accent1"/>
+          </a:effectRef>
+          <a:fontRef idx="minor">
+            <a:schemeClr val="tx1"/>
+          </a:fontRef>
+        </p:style>
+      </p:cxnSp>
+      <p:sp>
+        <p:nvSpPr>
+          <p:cNvPr id="6" name="Rounded Rectangle 5"/>
+          <p:cNvSpPr/>
+          <p:nvPr/>
+        </p:nvSpPr>
+        <p:spPr>
+          <a:xfrm>
+            <a:off x="4724400" y="1463040"/>
+            <a:ext cx="2743200" cy="384048"/>
+          </a:xfrm>
+          <a:prstGeom prst="roundRect">
+            <a:avLst/>
+          </a:prstGeom>
+          <a:solidFill>
+            <a:srgbClr val="EFF6FF"/>
+          </a:solidFill>
+          <a:ln w="15875">
+            <a:solidFill>
+              <a:srgbClr val="3B82F6"/>
+            </a:solidFill>
+          </a:ln>
+          <a:effectLst/>
+        </p:spPr>
+        <p:style>
+          <a:lnRef idx="1">
+            <a:schemeClr val="accent1"/>
+          </a:lnRef>
+          <a:fillRef idx="3">
+            <a:schemeClr val="accent1"/>
+          </a:fillRef>
+          <a:effectRef idx="2">
+            <a:schemeClr val="accent1"/>
+          </a:effectRef>
+          <a:fontRef idx="minor">
+            <a:schemeClr val="lt1"/>
+          </a:fontRef>
+        </p:style>
+        <p:txBody>
+          <a:bodyPr wrap="square" lIns="36576" tIns="18288" rIns="36576" bIns="18288" rtlCol="0" anchor="ctr"/>
+          <a:lstStyle/>
+          <a:p>
+            <a:pPr algn="ctr"/>
+            <a:r>
+              <a:rPr sz="900" b="1" i="0">
+                <a:solidFill>
+                  <a:srgbClr val="111827"/>
+                </a:solidFill>
+              </a:rPr>
+              <a:t>Stage 0 — CLOAK PII Guard</a:t>
+            </a:r>
+          </a:p>
+          <a:p>
+            <a:pPr algn="ctr"/>
+            <a:r>
+              <a:rPr sz="900" b="1" i="0">
+                <a:solidFill>
+                  <a:srgbClr val="111827"/>
+                </a:solidFill>
+              </a:rPr>
+              <a:t>(unchanged · Topic 5.5.2)</a:t>
+            </a:r>
+          </a:p>
+        </p:txBody>
+      </p:sp>
+      <p:cxnSp>
+        <p:nvCxnSpPr>
+          <p:cNvPr id="7" name="Connector 6"/>
+          <p:cNvCxnSpPr/>
+          <p:nvPr/>
+        </p:nvCxnSpPr>
+        <p:spPr>
+          <a:xfrm>
+            <a:off x="6096000" y="1847088"/>
+            <a:ext cx="0" cy="109728"/>
+          </a:xfrm>
+          <a:prstGeom prst="line">
+            <a:avLst/>
+          </a:prstGeom>
+          <a:ln w="19050">
+            <a:solidFill>
+              <a:srgbClr val="4B5563"/>
+            </a:solidFill>
+            <a:tailEnd type="triangle" w="med" len="med"/>
+          </a:ln>
+        </p:spPr>
+        <p:style>
+          <a:lnRef idx="2">
+            <a:schemeClr val="accent1"/>
+          </a:lnRef>
+          <a:fillRef idx="0">
+            <a:schemeClr val="accent1"/>
+          </a:fillRef>
+          <a:effectRef idx="1">
+            <a:schemeClr val="accent1"/>
+          </a:effectRef>
+          <a:fontRef idx="minor">
+            <a:schemeClr val="tx1"/>
+          </a:fontRef>
+        </p:style>
+      </p:cxnSp>
+      <p:sp>
+        <p:nvSpPr>
+          <p:cNvPr id="8" name="Rounded Rectangle 7"/>
+          <p:cNvSpPr/>
+          <p:nvPr/>
+        </p:nvSpPr>
+        <p:spPr>
+          <a:xfrm>
+            <a:off x="4724400" y="1956816"/>
+            <a:ext cx="2743200" cy="347472"/>
+          </a:xfrm>
+          <a:prstGeom prst="roundRect">
+            <a:avLst/>
+          </a:prstGeom>
+          <a:solidFill>
+            <a:srgbClr val="EFF6FF"/>
+          </a:solidFill>
+          <a:ln w="15875">
+            <a:solidFill>
+              <a:srgbClr val="3B82F6"/>
+            </a:solidFill>
+          </a:ln>
+          <a:effectLst/>
+        </p:spPr>
+        <p:style>
+          <a:lnRef idx="1">
+            <a:schemeClr val="accent1"/>
+          </a:lnRef>
+          <a:fillRef idx="3">
+            <a:schemeClr val="accent1"/>
+          </a:fillRef>
+          <a:effectRef idx="2">
+            <a:schemeClr val="accent1"/>
+          </a:effectRef>
+          <a:fontRef idx="minor">
+            <a:schemeClr val="lt1"/>
+          </a:fontRef>
+        </p:style>
+        <p:txBody>
+          <a:bodyPr wrap="square" lIns="36576" tIns="18288" rIns="36576" bIns="18288" rtlCol="0" anchor="ctr"/>
+          <a:lstStyle/>
+          <a:p>
+            <a:pPr algn="ctr"/>
+            <a:r>
+              <a:rPr sz="1000" b="1" i="0">
+                <a:solidFill>
+                  <a:srgbClr val="111827"/>
+                </a:solidFill>
+              </a:rPr>
+              <a:t>Safety check (unchanged · Topic 2.6)</a:t>
+            </a:r>
+          </a:p>
+        </p:txBody>
+      </p:sp>
+      <p:cxnSp>
+        <p:nvCxnSpPr>
+          <p:cNvPr id="9" name="Connector 8"/>
+          <p:cNvCxnSpPr/>
+          <p:nvPr/>
+        </p:nvCxnSpPr>
+        <p:spPr>
+          <a:xfrm>
+            <a:off x="6096000" y="2304288"/>
+            <a:ext cx="0" cy="109728"/>
+          </a:xfrm>
+          <a:prstGeom prst="line">
+            <a:avLst/>
+          </a:prstGeom>
+          <a:ln w="19050">
+            <a:solidFill>
+              <a:srgbClr val="4B5563"/>
+            </a:solidFill>
+            <a:tailEnd type="triangle" w="med" len="med"/>
+          </a:ln>
+        </p:spPr>
+        <p:style>
+          <a:lnRef idx="2">
+            <a:schemeClr val="accent1"/>
+          </a:lnRef>
+          <a:fillRef idx="0">
+            <a:schemeClr val="accent1"/>
+          </a:fillRef>
+          <a:effectRef idx="1">
+            <a:schemeClr val="accent1"/>
+          </a:effectRef>
+          <a:fontRef idx="minor">
+            <a:schemeClr val="tx1"/>
+          </a:fontRef>
+        </p:style>
+      </p:cxnSp>
+      <p:sp>
+        <p:nvSpPr>
+          <p:cNvPr id="10" name="Rounded Rectangle 9"/>
+          <p:cNvSpPr/>
+          <p:nvPr/>
+        </p:nvSpPr>
+        <p:spPr>
+          <a:xfrm>
+            <a:off x="365760" y="2414016"/>
+            <a:ext cx="11460480" cy="3246120"/>
+          </a:xfrm>
+          <a:prstGeom prst="roundRect">
+            <a:avLst/>
+          </a:prstGeom>
+          <a:solidFill>
+            <a:srgbClr val="FFF7ED"/>
+          </a:solidFill>
+          <a:ln w="19050">
+            <a:solidFill>
+              <a:srgbClr val="F97316"/>
+            </a:solidFill>
+          </a:ln>
+          <a:effectLst/>
+        </p:spPr>
+        <p:style>
+          <a:lnRef idx="1">
+            <a:schemeClr val="accent1"/>
+          </a:lnRef>
+          <a:fillRef idx="3">
+            <a:schemeClr val="accent1"/>
+          </a:fillRef>
+          <a:effectRef idx="2">
+            <a:schemeClr val="accent1"/>
+          </a:effectRef>
+          <a:fontRef idx="minor">
+            <a:schemeClr val="lt1"/>
+          </a:fontRef>
+        </p:style>
+        <p:txBody>
+          <a:bodyPr rtlCol="0" anchor="ctr"/>
+          <a:lstStyle/>
+          <a:p>
+            <a:pPr algn="ctr"/>
+            <a:endParaRPr/>
+          </a:p>
+        </p:txBody>
+      </p:sp>
+      <p:sp>
+        <p:nvSpPr>
+          <p:cNvPr id="11" name="TextBox 10"/>
+          <p:cNvSpPr txBox="1"/>
+          <p:nvPr/>
+        </p:nvSpPr>
+        <p:spPr>
+          <a:xfrm>
+            <a:off x="502920" y="2459736"/>
+            <a:ext cx="11186160" cy="256032"/>
+          </a:xfrm>
+          <a:prstGeom prst="rect">
+            <a:avLst/>
+          </a:prstGeom>
+          <a:noFill/>
+        </p:spPr>
+        <p:txBody>
+          <a:bodyPr wrap="square" lIns="36576" tIns="18288" rIns="36576" bIns="18288" anchor="t">
+            <a:spAutoFit/>
+          </a:bodyPr>
+          <a:lstStyle/>
+          <a:p>
+            <a:pPr algn="l"/>
+            <a:r>
+              <a:rPr sz="1000" b="1" i="0">
+                <a:solidFill>
+                  <a:srgbClr val="F97316"/>
+                </a:solidFill>
+              </a:rPr>
+              <a:t>CrewAI Hierarchical Crew (Topic 5.5)</a:t>
+            </a:r>
+          </a:p>
+        </p:txBody>
+      </p:sp>
+      <p:sp>
+        <p:nvSpPr>
+          <p:cNvPr id="12" name="Rounded Rectangle 11"/>
+          <p:cNvSpPr/>
+          <p:nvPr/>
+        </p:nvSpPr>
+        <p:spPr>
+          <a:xfrm>
+            <a:off x="4358640" y="2779776"/>
+            <a:ext cx="3474720" cy="502920"/>
+          </a:xfrm>
+          <a:prstGeom prst="roundRect">
+            <a:avLst/>
+          </a:prstGeom>
+          <a:solidFill>
+            <a:srgbClr val="FFEDD5"/>
+          </a:solidFill>
+          <a:ln w="15875">
+            <a:solidFill>
+              <a:srgbClr val="EA580C"/>
+            </a:solidFill>
+          </a:ln>
+          <a:effectLst/>
+        </p:spPr>
+        <p:style>
+          <a:lnRef idx="1">
+            <a:schemeClr val="accent1"/>
+          </a:lnRef>
+          <a:fillRef idx="3">
+            <a:schemeClr val="accent1"/>
+          </a:fillRef>
+          <a:effectRef idx="2">
+            <a:schemeClr val="accent1"/>
+          </a:effectRef>
+          <a:fontRef idx="minor">
+            <a:schemeClr val="lt1"/>
+          </a:fontRef>
+        </p:style>
+        <p:txBody>
+          <a:bodyPr wrap="square" lIns="36576" tIns="18288" rIns="36576" bIns="18288" rtlCol="0" anchor="ctr"/>
+          <a:lstStyle/>
+          <a:p>
+            <a:pPr algn="ctr"/>
+            <a:r>
+              <a:rPr sz="1000" b="1" i="0">
+                <a:solidFill>
+                  <a:srgbClr val="111827"/>
+                </a:solidFill>
+              </a:rPr>
+              <a:t>Triaging Agent</a:t>
+            </a:r>
+          </a:p>
+          <a:p>
+            <a:pPr algn="ctr"/>
+            <a:r>
+              <a:rPr sz="1000" b="1" i="0">
+                <a:solidFill>
+                  <a:srgbClr val="111827"/>
+                </a:solidFill>
+              </a:rPr>
+              <a:t>reads case · picks 2–4 of 12 categories</a:t>
+            </a:r>
+          </a:p>
+        </p:txBody>
+      </p:sp>
+      <p:sp>
+        <p:nvSpPr>
+          <p:cNvPr id="13" name="TextBox 12"/>
+          <p:cNvSpPr txBox="1"/>
+          <p:nvPr/>
+        </p:nvSpPr>
+        <p:spPr>
+          <a:xfrm>
+            <a:off x="7970520" y="2871216"/>
+            <a:ext cx="2743200" cy="365760"/>
+          </a:xfrm>
+          <a:prstGeom prst="rect">
+            <a:avLst/>
+          </a:prstGeom>
+          <a:noFill/>
+        </p:spPr>
+        <p:txBody>
+          <a:bodyPr wrap="square" lIns="18288" tIns="0" rIns="18288" bIns="0">
+            <a:spAutoFit/>
+          </a:bodyPr>
+          <a:lstStyle/>
+          <a:p>
+            <a:pPr algn="l"/>
+            <a:r>
+              <a:rPr sz="900" i="1">
+                <a:solidFill>
+                  <a:srgbClr val="6B7280"/>
+                </a:solidFill>
+              </a:rPr>
+              <a:t>← 1 LLM call (gpt-4.1-mini)</a:t>
+            </a:r>
+          </a:p>
+        </p:txBody>
+      </p:sp>
+      <p:sp>
+        <p:nvSpPr>
+          <p:cNvPr id="14" name="Rounded Rectangle 13"/>
+          <p:cNvSpPr/>
+          <p:nvPr/>
+        </p:nvSpPr>
+        <p:spPr>
+          <a:xfrm>
+            <a:off x="746759" y="3511296"/>
+            <a:ext cx="1645920" cy="457200"/>
+          </a:xfrm>
+          <a:prstGeom prst="roundRect">
+            <a:avLst/>
+          </a:prstGeom>
+          <a:solidFill>
+            <a:srgbClr val="FFEDD5"/>
+          </a:solidFill>
+          <a:ln w="15875">
+            <a:solidFill>
+              <a:srgbClr val="EA580C"/>
+            </a:solidFill>
+          </a:ln>
+          <a:effectLst/>
+        </p:spPr>
+        <p:style>
+          <a:lnRef idx="1">
+            <a:schemeClr val="accent1"/>
+          </a:lnRef>
+          <a:fillRef idx="3">
+            <a:schemeClr val="accent1"/>
+          </a:fillRef>
+          <a:effectRef idx="2">
+            <a:schemeClr val="accent1"/>
+          </a:effectRef>
+          <a:fontRef idx="minor">
+            <a:schemeClr val="lt1"/>
+          </a:fontRef>
+        </p:style>
+        <p:txBody>
+          <a:bodyPr wrap="square" lIns="36576" tIns="18288" rIns="36576" bIns="18288" rtlCol="0" anchor="ctr"/>
+          <a:lstStyle/>
+          <a:p>
+            <a:pPr algn="ctr"/>
+            <a:r>
+              <a:rPr sz="900" b="1" i="0">
+                <a:solidFill>
+                  <a:srgbClr val="111827"/>
+                </a:solidFill>
+              </a:rPr>
+              <a:t>Financial</a:t>
+            </a:r>
+          </a:p>
+          <a:p>
+            <a:pPr algn="ctr"/>
+            <a:r>
+              <a:rPr sz="900" b="1" i="0">
+                <a:solidFill>
+                  <a:srgbClr val="111827"/>
+                </a:solidFill>
+              </a:rPr>
+              <a:t>agent</a:t>
+            </a:r>
+          </a:p>
+        </p:txBody>
+      </p:sp>
+      <p:cxnSp>
+        <p:nvCxnSpPr>
+          <p:cNvPr id="15" name="Connector 14"/>
+          <p:cNvCxnSpPr/>
+          <p:nvPr/>
+        </p:nvCxnSpPr>
+        <p:spPr>
+          <a:xfrm flipH="1">
+            <a:off x="1569719" y="3282696"/>
+            <a:ext cx="4526281" cy="228600"/>
+          </a:xfrm>
+          <a:prstGeom prst="line">
+            <a:avLst/>
+          </a:prstGeom>
+          <a:ln w="6350">
+            <a:solidFill>
+              <a:srgbClr val="9CA3AF"/>
+            </a:solidFill>
+            <a:tailEnd type="triangle" w="sm" len="sm"/>
+          </a:ln>
+        </p:spPr>
+        <p:style>
+          <a:lnRef idx="2">
+            <a:schemeClr val="accent1"/>
+          </a:lnRef>
+          <a:fillRef idx="0">
+            <a:schemeClr val="accent1"/>
+          </a:fillRef>
+          <a:effectRef idx="1">
+            <a:schemeClr val="accent1"/>
+          </a:effectRef>
+          <a:fontRef idx="minor">
+            <a:schemeClr val="tx1"/>
+          </a:fontRef>
+        </p:style>
+      </p:cxnSp>
+      <p:sp>
+        <p:nvSpPr>
+          <p:cNvPr id="16" name="Rounded Rectangle 15"/>
+          <p:cNvSpPr/>
+          <p:nvPr/>
+        </p:nvSpPr>
+        <p:spPr>
+          <a:xfrm>
+            <a:off x="2557272" y="3511296"/>
+            <a:ext cx="1645920" cy="457200"/>
+          </a:xfrm>
+          <a:prstGeom prst="roundRect">
+            <a:avLst/>
+          </a:prstGeom>
+          <a:solidFill>
+            <a:srgbClr val="FFEDD5"/>
+          </a:solidFill>
+          <a:ln w="15875">
+            <a:solidFill>
+              <a:srgbClr val="EA580C"/>
+            </a:solidFill>
+          </a:ln>
+          <a:effectLst/>
+        </p:spPr>
+        <p:style>
+          <a:lnRef idx="1">
+            <a:schemeClr val="accent1"/>
+          </a:lnRef>
+          <a:fillRef idx="3">
+            <a:schemeClr val="accent1"/>
+          </a:fillRef>
+          <a:effectRef idx="2">
+            <a:schemeClr val="accent1"/>
+          </a:effectRef>
+          <a:fontRef idx="minor">
+            <a:schemeClr val="lt1"/>
+          </a:fontRef>
+        </p:style>
+        <p:txBody>
+          <a:bodyPr wrap="square" lIns="36576" tIns="18288" rIns="36576" bIns="18288" rtlCol="0" anchor="ctr"/>
+          <a:lstStyle/>
+          <a:p>
+            <a:pPr algn="ctr"/>
+            <a:r>
+              <a:rPr sz="900" b="1" i="0">
+                <a:solidFill>
+                  <a:srgbClr val="111827"/>
+                </a:solidFill>
+              </a:rPr>
+              <a:t>Family</a:t>
+            </a:r>
+          </a:p>
+          <a:p>
+            <a:pPr algn="ctr"/>
+            <a:r>
+              <a:rPr sz="900" b="1" i="0">
+                <a:solidFill>
+                  <a:srgbClr val="111827"/>
+                </a:solidFill>
+              </a:rPr>
+              <a:t>agent</a:t>
+            </a:r>
+          </a:p>
+        </p:txBody>
+      </p:sp>
+      <p:cxnSp>
+        <p:nvCxnSpPr>
+          <p:cNvPr id="17" name="Connector 16"/>
+          <p:cNvCxnSpPr/>
+          <p:nvPr/>
+        </p:nvCxnSpPr>
+        <p:spPr>
+          <a:xfrm flipH="1">
+            <a:off x="3380231" y="3282696"/>
+            <a:ext cx="2715769" cy="228600"/>
+          </a:xfrm>
+          <a:prstGeom prst="line">
+            <a:avLst/>
+          </a:prstGeom>
+          <a:ln w="6350">
+            <a:solidFill>
+              <a:srgbClr val="9CA3AF"/>
+            </a:solidFill>
+            <a:tailEnd type="triangle" w="sm" len="sm"/>
+          </a:ln>
+        </p:spPr>
+        <p:style>
+          <a:lnRef idx="2">
+            <a:schemeClr val="accent1"/>
+          </a:lnRef>
+          <a:fillRef idx="0">
+            <a:schemeClr val="accent1"/>
+          </a:fillRef>
+          <a:effectRef idx="1">
+            <a:schemeClr val="accent1"/>
+          </a:effectRef>
+          <a:fontRef idx="minor">
+            <a:schemeClr val="tx1"/>
+          </a:fontRef>
+        </p:style>
+      </p:cxnSp>
+      <p:sp>
+        <p:nvSpPr>
+          <p:cNvPr id="18" name="Rounded Rectangle 17"/>
+          <p:cNvSpPr/>
+          <p:nvPr/>
+        </p:nvSpPr>
+        <p:spPr>
+          <a:xfrm>
+            <a:off x="4367784" y="3511296"/>
+            <a:ext cx="1645920" cy="457200"/>
+          </a:xfrm>
+          <a:prstGeom prst="roundRect">
+            <a:avLst/>
+          </a:prstGeom>
+          <a:solidFill>
+            <a:srgbClr val="FFEDD5"/>
+          </a:solidFill>
+          <a:ln w="15875">
+            <a:solidFill>
+              <a:srgbClr val="EA580C"/>
+            </a:solidFill>
+          </a:ln>
+          <a:effectLst/>
+        </p:spPr>
+        <p:style>
+          <a:lnRef idx="1">
+            <a:schemeClr val="accent1"/>
+          </a:lnRef>
+          <a:fillRef idx="3">
+            <a:schemeClr val="accent1"/>
+          </a:fillRef>
+          <a:effectRef idx="2">
+            <a:schemeClr val="accent1"/>
+          </a:effectRef>
+          <a:fontRef idx="minor">
+            <a:schemeClr val="lt1"/>
+          </a:fontRef>
+        </p:style>
+        <p:txBody>
+          <a:bodyPr wrap="square" lIns="36576" tIns="18288" rIns="36576" bIns="18288" rtlCol="0" anchor="ctr"/>
+          <a:lstStyle/>
+          <a:p>
+            <a:pPr algn="ctr"/>
+            <a:r>
+              <a:rPr sz="900" b="1" i="0">
+                <a:solidFill>
+                  <a:srgbClr val="111827"/>
+                </a:solidFill>
+              </a:rPr>
+              <a:t>Caregiving</a:t>
+            </a:r>
+          </a:p>
+          <a:p>
+            <a:pPr algn="ctr"/>
+            <a:r>
+              <a:rPr sz="900" b="1" i="0">
+                <a:solidFill>
+                  <a:srgbClr val="111827"/>
+                </a:solidFill>
+              </a:rPr>
+              <a:t>agent</a:t>
+            </a:r>
+          </a:p>
+        </p:txBody>
+      </p:sp>
+      <p:cxnSp>
+        <p:nvCxnSpPr>
+          <p:cNvPr id="19" name="Connector 18"/>
+          <p:cNvCxnSpPr/>
+          <p:nvPr/>
+        </p:nvCxnSpPr>
+        <p:spPr>
+          <a:xfrm flipH="1">
+            <a:off x="5190744" y="3282696"/>
+            <a:ext cx="905256" cy="228600"/>
+          </a:xfrm>
+          <a:prstGeom prst="line">
+            <a:avLst/>
+          </a:prstGeom>
+          <a:ln w="6350">
+            <a:solidFill>
+              <a:srgbClr val="9CA3AF"/>
+            </a:solidFill>
+            <a:tailEnd type="triangle" w="sm" len="sm"/>
+          </a:ln>
+        </p:spPr>
+        <p:style>
+          <a:lnRef idx="2">
+            <a:schemeClr val="accent1"/>
+          </a:lnRef>
+          <a:fillRef idx="0">
+            <a:schemeClr val="accent1"/>
+          </a:fillRef>
+          <a:effectRef idx="1">
+            <a:schemeClr val="accent1"/>
+          </a:effectRef>
+          <a:fontRef idx="minor">
+            <a:schemeClr val="tx1"/>
+          </a:fontRef>
+        </p:style>
+      </p:cxnSp>
+      <p:sp>
+        <p:nvSpPr>
+          <p:cNvPr id="20" name="Rounded Rectangle 19"/>
+          <p:cNvSpPr/>
+          <p:nvPr/>
+        </p:nvSpPr>
+        <p:spPr>
+          <a:xfrm>
+            <a:off x="6178295" y="3511296"/>
+            <a:ext cx="1645920" cy="457200"/>
+          </a:xfrm>
+          <a:prstGeom prst="roundRect">
+            <a:avLst/>
+          </a:prstGeom>
+          <a:solidFill>
+            <a:srgbClr val="FFEDD5"/>
+          </a:solidFill>
+          <a:ln w="15875">
+            <a:solidFill>
+              <a:srgbClr val="EA580C"/>
+            </a:solidFill>
+          </a:ln>
+          <a:effectLst/>
+        </p:spPr>
+        <p:style>
+          <a:lnRef idx="1">
+            <a:schemeClr val="accent1"/>
+          </a:lnRef>
+          <a:fillRef idx="3">
+            <a:schemeClr val="accent1"/>
+          </a:fillRef>
+          <a:effectRef idx="2">
+            <a:schemeClr val="accent1"/>
+          </a:effectRef>
+          <a:fontRef idx="minor">
+            <a:schemeClr val="lt1"/>
+          </a:fontRef>
+        </p:style>
+        <p:txBody>
+          <a:bodyPr wrap="square" lIns="36576" tIns="18288" rIns="36576" bIns="18288" rtlCol="0" anchor="ctr"/>
+          <a:lstStyle/>
+          <a:p>
+            <a:pPr algn="ctr"/>
+            <a:r>
+              <a:rPr sz="900" b="1" i="0">
+                <a:solidFill>
+                  <a:srgbClr val="111827"/>
+                </a:solidFill>
+              </a:rPr>
+              <a:t>Healthcare</a:t>
+            </a:r>
+          </a:p>
+          <a:p>
+            <a:pPr algn="ctr"/>
+            <a:r>
+              <a:rPr sz="900" b="1" i="0">
+                <a:solidFill>
+                  <a:srgbClr val="111827"/>
+                </a:solidFill>
+              </a:rPr>
+              <a:t>agent</a:t>
+            </a:r>
+          </a:p>
+        </p:txBody>
+      </p:sp>
+      <p:cxnSp>
+        <p:nvCxnSpPr>
+          <p:cNvPr id="21" name="Connector 20"/>
+          <p:cNvCxnSpPr/>
+          <p:nvPr/>
+        </p:nvCxnSpPr>
+        <p:spPr>
+          <a:xfrm>
+            <a:off x="6096000" y="3282696"/>
+            <a:ext cx="905256" cy="228600"/>
+          </a:xfrm>
+          <a:prstGeom prst="line">
+            <a:avLst/>
+          </a:prstGeom>
+          <a:ln w="6350">
+            <a:solidFill>
+              <a:srgbClr val="9CA3AF"/>
+            </a:solidFill>
+            <a:tailEnd type="triangle" w="sm" len="sm"/>
+          </a:ln>
+        </p:spPr>
+        <p:style>
+          <a:lnRef idx="2">
+            <a:schemeClr val="accent1"/>
+          </a:lnRef>
+          <a:fillRef idx="0">
+            <a:schemeClr val="accent1"/>
+          </a:fillRef>
+          <a:effectRef idx="1">
+            <a:schemeClr val="accent1"/>
+          </a:effectRef>
+          <a:fontRef idx="minor">
+            <a:schemeClr val="tx1"/>
+          </a:fontRef>
+        </p:style>
+      </p:cxnSp>
+      <p:sp>
+        <p:nvSpPr>
+          <p:cNvPr id="22" name="Rounded Rectangle 21"/>
+          <p:cNvSpPr/>
+          <p:nvPr/>
+        </p:nvSpPr>
+        <p:spPr>
+          <a:xfrm>
+            <a:off x="7988808" y="3511296"/>
+            <a:ext cx="1645920" cy="457200"/>
+          </a:xfrm>
+          <a:prstGeom prst="roundRect">
+            <a:avLst/>
+          </a:prstGeom>
+          <a:solidFill>
+            <a:srgbClr val="FFEDD5"/>
+          </a:solidFill>
+          <a:ln w="15875">
+            <a:solidFill>
+              <a:srgbClr val="EA580C"/>
+            </a:solidFill>
+          </a:ln>
+          <a:effectLst/>
+        </p:spPr>
+        <p:style>
+          <a:lnRef idx="1">
+            <a:schemeClr val="accent1"/>
+          </a:lnRef>
+          <a:fillRef idx="3">
+            <a:schemeClr val="accent1"/>
+          </a:fillRef>
+          <a:effectRef idx="2">
+            <a:schemeClr val="accent1"/>
+          </a:effectRef>
+          <a:fontRef idx="minor">
+            <a:schemeClr val="lt1"/>
+          </a:fontRef>
+        </p:style>
+        <p:txBody>
+          <a:bodyPr wrap="square" lIns="36576" tIns="18288" rIns="36576" bIns="18288" rtlCol="0" anchor="ctr"/>
+          <a:lstStyle/>
+          <a:p>
+            <a:pPr algn="ctr"/>
+            <a:r>
+              <a:rPr sz="900" b="1" i="0">
+                <a:solidFill>
+                  <a:srgbClr val="111827"/>
+                </a:solidFill>
+              </a:rPr>
+              <a:t>Mental Health</a:t>
+            </a:r>
+          </a:p>
+          <a:p>
+            <a:pPr algn="ctr"/>
+            <a:r>
+              <a:rPr sz="900" b="1" i="0">
+                <a:solidFill>
+                  <a:srgbClr val="111827"/>
+                </a:solidFill>
+              </a:rPr>
+              <a:t>agent</a:t>
+            </a:r>
+          </a:p>
+        </p:txBody>
+      </p:sp>
+      <p:cxnSp>
+        <p:nvCxnSpPr>
+          <p:cNvPr id="23" name="Connector 22"/>
+          <p:cNvCxnSpPr/>
+          <p:nvPr/>
+        </p:nvCxnSpPr>
+        <p:spPr>
+          <a:xfrm>
+            <a:off x="6096000" y="3282696"/>
+            <a:ext cx="2715768" cy="228600"/>
+          </a:xfrm>
+          <a:prstGeom prst="line">
+            <a:avLst/>
+          </a:prstGeom>
+          <a:ln w="6350">
+            <a:solidFill>
+              <a:srgbClr val="9CA3AF"/>
+            </a:solidFill>
+            <a:tailEnd type="triangle" w="sm" len="sm"/>
+          </a:ln>
+        </p:spPr>
+        <p:style>
+          <a:lnRef idx="2">
+            <a:schemeClr val="accent1"/>
+          </a:lnRef>
+          <a:fillRef idx="0">
+            <a:schemeClr val="accent1"/>
+          </a:fillRef>
+          <a:effectRef idx="1">
+            <a:schemeClr val="accent1"/>
+          </a:effectRef>
+          <a:fontRef idx="minor">
+            <a:schemeClr val="tx1"/>
+          </a:fontRef>
+        </p:style>
+      </p:cxnSp>
+      <p:sp>
+        <p:nvSpPr>
+          <p:cNvPr id="24" name="Rounded Rectangle 23"/>
+          <p:cNvSpPr/>
+          <p:nvPr/>
+        </p:nvSpPr>
+        <p:spPr>
+          <a:xfrm>
+            <a:off x="9799320" y="3511296"/>
+            <a:ext cx="1645920" cy="457200"/>
+          </a:xfrm>
+          <a:prstGeom prst="roundRect">
+            <a:avLst/>
+          </a:prstGeom>
+          <a:solidFill>
+            <a:srgbClr val="FFEDD5"/>
+          </a:solidFill>
+          <a:ln w="15875">
+            <a:solidFill>
+              <a:srgbClr val="EA580C"/>
+            </a:solidFill>
+          </a:ln>
+          <a:effectLst/>
+        </p:spPr>
+        <p:style>
+          <a:lnRef idx="1">
+            <a:schemeClr val="accent1"/>
+          </a:lnRef>
+          <a:fillRef idx="3">
+            <a:schemeClr val="accent1"/>
+          </a:fillRef>
+          <a:effectRef idx="2">
+            <a:schemeClr val="accent1"/>
+          </a:effectRef>
+          <a:fontRef idx="minor">
+            <a:schemeClr val="lt1"/>
+          </a:fontRef>
+        </p:style>
+        <p:txBody>
+          <a:bodyPr wrap="square" lIns="36576" tIns="18288" rIns="36576" bIns="18288" rtlCol="0" anchor="ctr"/>
+          <a:lstStyle/>
+          <a:p>
+            <a:pPr algn="ctr"/>
+            <a:r>
+              <a:rPr sz="900" b="1" i="0">
+                <a:solidFill>
+                  <a:srgbClr val="111827"/>
+                </a:solidFill>
+              </a:rPr>
+              <a:t>Crisis</a:t>
+            </a:r>
+          </a:p>
+          <a:p>
+            <a:pPr algn="ctr"/>
+            <a:r>
+              <a:rPr sz="900" b="1" i="0">
+                <a:solidFill>
+                  <a:srgbClr val="111827"/>
+                </a:solidFill>
+              </a:rPr>
+              <a:t>agent</a:t>
+            </a:r>
+          </a:p>
+        </p:txBody>
+      </p:sp>
+      <p:cxnSp>
+        <p:nvCxnSpPr>
+          <p:cNvPr id="25" name="Connector 24"/>
+          <p:cNvCxnSpPr/>
+          <p:nvPr/>
+        </p:nvCxnSpPr>
+        <p:spPr>
+          <a:xfrm>
+            <a:off x="6096000" y="3282696"/>
+            <a:ext cx="4526280" cy="228600"/>
+          </a:xfrm>
+          <a:prstGeom prst="line">
+            <a:avLst/>
+          </a:prstGeom>
+          <a:ln w="6350">
+            <a:solidFill>
+              <a:srgbClr val="9CA3AF"/>
+            </a:solidFill>
+            <a:tailEnd type="triangle" w="sm" len="sm"/>
+          </a:ln>
+        </p:spPr>
+        <p:style>
+          <a:lnRef idx="2">
+            <a:schemeClr val="accent1"/>
+          </a:lnRef>
+          <a:fillRef idx="0">
+            <a:schemeClr val="accent1"/>
+          </a:fillRef>
+          <a:effectRef idx="1">
+            <a:schemeClr val="accent1"/>
+          </a:effectRef>
+          <a:fontRef idx="minor">
+            <a:schemeClr val="tx1"/>
+          </a:fontRef>
+        </p:style>
+      </p:cxnSp>
+      <p:sp>
+        <p:nvSpPr>
+          <p:cNvPr id="26" name="Rounded Rectangle 25"/>
+          <p:cNvSpPr/>
+          <p:nvPr/>
+        </p:nvSpPr>
+        <p:spPr>
+          <a:xfrm>
+            <a:off x="746759" y="4078224"/>
+            <a:ext cx="1645920" cy="457200"/>
+          </a:xfrm>
+          <a:prstGeom prst="roundRect">
+            <a:avLst/>
+          </a:prstGeom>
+          <a:solidFill>
+            <a:srgbClr val="FFEDD5"/>
+          </a:solidFill>
+          <a:ln w="15875">
+            <a:solidFill>
+              <a:srgbClr val="EA580C"/>
+            </a:solidFill>
+          </a:ln>
+          <a:effectLst/>
+        </p:spPr>
+        <p:style>
+          <a:lnRef idx="1">
+            <a:schemeClr val="accent1"/>
+          </a:lnRef>
+          <a:fillRef idx="3">
+            <a:schemeClr val="accent1"/>
+          </a:fillRef>
+          <a:effectRef idx="2">
+            <a:schemeClr val="accent1"/>
+          </a:effectRef>
+          <a:fontRef idx="minor">
+            <a:schemeClr val="lt1"/>
+          </a:fontRef>
+        </p:style>
+        <p:txBody>
+          <a:bodyPr wrap="square" lIns="36576" tIns="18288" rIns="36576" bIns="18288" rtlCol="0" anchor="ctr"/>
+          <a:lstStyle/>
+          <a:p>
+            <a:pPr algn="ctr"/>
+            <a:r>
+              <a:rPr sz="900" b="1" i="0">
+                <a:solidFill>
+                  <a:srgbClr val="111827"/>
+                </a:solidFill>
+              </a:rPr>
+              <a:t>Disability</a:t>
+            </a:r>
+          </a:p>
+          <a:p>
+            <a:pPr algn="ctr"/>
+            <a:r>
+              <a:rPr sz="900" b="1" i="0">
+                <a:solidFill>
+                  <a:srgbClr val="111827"/>
+                </a:solidFill>
+              </a:rPr>
+              <a:t>agent</a:t>
+            </a:r>
+          </a:p>
+        </p:txBody>
+      </p:sp>
+      <p:cxnSp>
+        <p:nvCxnSpPr>
+          <p:cNvPr id="27" name="Connector 26"/>
+          <p:cNvCxnSpPr/>
+          <p:nvPr/>
+        </p:nvCxnSpPr>
+        <p:spPr>
+          <a:xfrm flipH="1">
+            <a:off x="1569719" y="3282696"/>
+            <a:ext cx="4526281" cy="795528"/>
+          </a:xfrm>
+          <a:prstGeom prst="line">
+            <a:avLst/>
+          </a:prstGeom>
+          <a:ln w="6350">
+            <a:solidFill>
+              <a:srgbClr val="9CA3AF"/>
+            </a:solidFill>
+            <a:tailEnd type="triangle" w="sm" len="sm"/>
+          </a:ln>
+        </p:spPr>
+        <p:style>
+          <a:lnRef idx="2">
+            <a:schemeClr val="accent1"/>
+          </a:lnRef>
+          <a:fillRef idx="0">
+            <a:schemeClr val="accent1"/>
+          </a:fillRef>
+          <a:effectRef idx="1">
+            <a:schemeClr val="accent1"/>
+          </a:effectRef>
+          <a:fontRef idx="minor">
+            <a:schemeClr val="tx1"/>
+          </a:fontRef>
+        </p:style>
+      </p:cxnSp>
+      <p:sp>
+        <p:nvSpPr>
+          <p:cNvPr id="28" name="Rounded Rectangle 27"/>
+          <p:cNvSpPr/>
+          <p:nvPr/>
+        </p:nvSpPr>
+        <p:spPr>
+          <a:xfrm>
+            <a:off x="2557272" y="4078224"/>
+            <a:ext cx="1645920" cy="457200"/>
+          </a:xfrm>
+          <a:prstGeom prst="roundRect">
+            <a:avLst/>
+          </a:prstGeom>
+          <a:solidFill>
+            <a:srgbClr val="FFEDD5"/>
+          </a:solidFill>
+          <a:ln w="15875">
+            <a:solidFill>
+              <a:srgbClr val="EA580C"/>
+            </a:solidFill>
+          </a:ln>
+          <a:effectLst/>
+        </p:spPr>
+        <p:style>
+          <a:lnRef idx="1">
+            <a:schemeClr val="accent1"/>
+          </a:lnRef>
+          <a:fillRef idx="3">
+            <a:schemeClr val="accent1"/>
+          </a:fillRef>
+          <a:effectRef idx="2">
+            <a:schemeClr val="accent1"/>
+          </a:effectRef>
+          <a:fontRef idx="minor">
+            <a:schemeClr val="lt1"/>
+          </a:fontRef>
+        </p:style>
+        <p:txBody>
+          <a:bodyPr wrap="square" lIns="36576" tIns="18288" rIns="36576" bIns="18288" rtlCol="0" anchor="ctr"/>
+          <a:lstStyle/>
+          <a:p>
+            <a:pPr algn="ctr"/>
+            <a:r>
+              <a:rPr sz="900" b="1" i="0">
+                <a:solidFill>
+                  <a:srgbClr val="111827"/>
+                </a:solidFill>
+              </a:rPr>
+              <a:t>Youth</a:t>
+            </a:r>
+          </a:p>
+          <a:p>
+            <a:pPr algn="ctr"/>
+            <a:r>
+              <a:rPr sz="900" b="1" i="0">
+                <a:solidFill>
+                  <a:srgbClr val="111827"/>
+                </a:solidFill>
+              </a:rPr>
+              <a:t>agent</a:t>
+            </a:r>
+          </a:p>
+        </p:txBody>
+      </p:sp>
+      <p:cxnSp>
+        <p:nvCxnSpPr>
+          <p:cNvPr id="29" name="Connector 28"/>
+          <p:cNvCxnSpPr/>
+          <p:nvPr/>
+        </p:nvCxnSpPr>
+        <p:spPr>
+          <a:xfrm flipH="1">
+            <a:off x="3380231" y="3282696"/>
+            <a:ext cx="2715769" cy="795528"/>
+          </a:xfrm>
+          <a:prstGeom prst="line">
+            <a:avLst/>
+          </a:prstGeom>
+          <a:ln w="6350">
+            <a:solidFill>
+              <a:srgbClr val="9CA3AF"/>
+            </a:solidFill>
+            <a:tailEnd type="triangle" w="sm" len="sm"/>
+          </a:ln>
+        </p:spPr>
+        <p:style>
+          <a:lnRef idx="2">
+            <a:schemeClr val="accent1"/>
+          </a:lnRef>
+          <a:fillRef idx="0">
+            <a:schemeClr val="accent1"/>
+          </a:fillRef>
+          <a:effectRef idx="1">
+            <a:schemeClr val="accent1"/>
+          </a:effectRef>
+          <a:fontRef idx="minor">
+            <a:schemeClr val="tx1"/>
+          </a:fontRef>
+        </p:style>
+      </p:cxnSp>
+      <p:sp>
+        <p:nvSpPr>
+          <p:cNvPr id="30" name="Rounded Rectangle 29"/>
+          <p:cNvSpPr/>
+          <p:nvPr/>
+        </p:nvSpPr>
+        <p:spPr>
+          <a:xfrm>
+            <a:off x="4367784" y="4078224"/>
+            <a:ext cx="1645920" cy="457200"/>
+          </a:xfrm>
+          <a:prstGeom prst="roundRect">
+            <a:avLst/>
+          </a:prstGeom>
+          <a:solidFill>
+            <a:srgbClr val="FFEDD5"/>
+          </a:solidFill>
+          <a:ln w="15875">
+            <a:solidFill>
+              <a:srgbClr val="EA580C"/>
+            </a:solidFill>
+          </a:ln>
+          <a:effectLst/>
+        </p:spPr>
+        <p:style>
+          <a:lnRef idx="1">
+            <a:schemeClr val="accent1"/>
+          </a:lnRef>
+          <a:fillRef idx="3">
+            <a:schemeClr val="accent1"/>
+          </a:fillRef>
+          <a:effectRef idx="2">
+            <a:schemeClr val="accent1"/>
+          </a:effectRef>
+          <a:fontRef idx="minor">
+            <a:schemeClr val="lt1"/>
+          </a:fontRef>
+        </p:style>
+        <p:txBody>
+          <a:bodyPr wrap="square" lIns="36576" tIns="18288" rIns="36576" bIns="18288" rtlCol="0" anchor="ctr"/>
+          <a:lstStyle/>
+          <a:p>
+            <a:pPr algn="ctr"/>
+            <a:r>
+              <a:rPr sz="900" b="1" i="0">
+                <a:solidFill>
+                  <a:srgbClr val="111827"/>
+                </a:solidFill>
+              </a:rPr>
+              <a:t>Education</a:t>
+            </a:r>
+          </a:p>
+          <a:p>
+            <a:pPr algn="ctr"/>
+            <a:r>
+              <a:rPr sz="900" b="1" i="0">
+                <a:solidFill>
+                  <a:srgbClr val="111827"/>
+                </a:solidFill>
+              </a:rPr>
+              <a:t>agent</a:t>
+            </a:r>
+          </a:p>
+        </p:txBody>
+      </p:sp>
+      <p:cxnSp>
+        <p:nvCxnSpPr>
+          <p:cNvPr id="31" name="Connector 30"/>
+          <p:cNvCxnSpPr/>
+          <p:nvPr/>
+        </p:nvCxnSpPr>
+        <p:spPr>
+          <a:xfrm flipH="1">
+            <a:off x="5190744" y="3282696"/>
+            <a:ext cx="905256" cy="795528"/>
+          </a:xfrm>
+          <a:prstGeom prst="line">
+            <a:avLst/>
+          </a:prstGeom>
+          <a:ln w="6350">
+            <a:solidFill>
+              <a:srgbClr val="9CA3AF"/>
+            </a:solidFill>
+            <a:tailEnd type="triangle" w="sm" len="sm"/>
+          </a:ln>
+        </p:spPr>
+        <p:style>
+          <a:lnRef idx="2">
+            <a:schemeClr val="accent1"/>
+          </a:lnRef>
+          <a:fillRef idx="0">
+            <a:schemeClr val="accent1"/>
+          </a:fillRef>
+          <a:effectRef idx="1">
+            <a:schemeClr val="accent1"/>
+          </a:effectRef>
+          <a:fontRef idx="minor">
+            <a:schemeClr val="tx1"/>
+          </a:fontRef>
+        </p:style>
+      </p:cxnSp>
+      <p:sp>
+        <p:nvSpPr>
+          <p:cNvPr id="32" name="Rounded Rectangle 31"/>
+          <p:cNvSpPr/>
+          <p:nvPr/>
+        </p:nvSpPr>
+        <p:spPr>
+          <a:xfrm>
+            <a:off x="6178295" y="4078224"/>
+            <a:ext cx="1645920" cy="457200"/>
+          </a:xfrm>
+          <a:prstGeom prst="roundRect">
+            <a:avLst/>
+          </a:prstGeom>
+          <a:solidFill>
+            <a:srgbClr val="FFEDD5"/>
+          </a:solidFill>
+          <a:ln w="15875">
+            <a:solidFill>
+              <a:srgbClr val="EA580C"/>
+            </a:solidFill>
+          </a:ln>
+          <a:effectLst/>
+        </p:spPr>
+        <p:style>
+          <a:lnRef idx="1">
+            <a:schemeClr val="accent1"/>
+          </a:lnRef>
+          <a:fillRef idx="3">
+            <a:schemeClr val="accent1"/>
+          </a:fillRef>
+          <a:effectRef idx="2">
+            <a:schemeClr val="accent1"/>
+          </a:effectRef>
+          <a:fontRef idx="minor">
+            <a:schemeClr val="lt1"/>
+          </a:fontRef>
+        </p:style>
+        <p:txBody>
+          <a:bodyPr wrap="square" lIns="36576" tIns="18288" rIns="36576" bIns="18288" rtlCol="0" anchor="ctr"/>
+          <a:lstStyle/>
+          <a:p>
+            <a:pPr algn="ctr"/>
+            <a:r>
+              <a:rPr sz="900" b="1" i="0">
+                <a:solidFill>
+                  <a:srgbClr val="111827"/>
+                </a:solidFill>
+              </a:rPr>
+              <a:t>Housing</a:t>
+            </a:r>
+          </a:p>
+          <a:p>
+            <a:pPr algn="ctr"/>
+            <a:r>
+              <a:rPr sz="900" b="1" i="0">
+                <a:solidFill>
+                  <a:srgbClr val="111827"/>
+                </a:solidFill>
+              </a:rPr>
+              <a:t>agent</a:t>
+            </a:r>
+          </a:p>
+        </p:txBody>
+      </p:sp>
+      <p:cxnSp>
+        <p:nvCxnSpPr>
+          <p:cNvPr id="33" name="Connector 32"/>
+          <p:cNvCxnSpPr/>
+          <p:nvPr/>
+        </p:nvCxnSpPr>
+        <p:spPr>
+          <a:xfrm>
+            <a:off x="6096000" y="3282696"/>
+            <a:ext cx="905256" cy="795528"/>
+          </a:xfrm>
+          <a:prstGeom prst="line">
+            <a:avLst/>
+          </a:prstGeom>
+          <a:ln w="6350">
+            <a:solidFill>
+              <a:srgbClr val="9CA3AF"/>
+            </a:solidFill>
+            <a:tailEnd type="triangle" w="sm" len="sm"/>
+          </a:ln>
+        </p:spPr>
+        <p:style>
+          <a:lnRef idx="2">
+            <a:schemeClr val="accent1"/>
+          </a:lnRef>
+          <a:fillRef idx="0">
+            <a:schemeClr val="accent1"/>
+          </a:fillRef>
+          <a:effectRef idx="1">
+            <a:schemeClr val="accent1"/>
+          </a:effectRef>
+          <a:fontRef idx="minor">
+            <a:schemeClr val="tx1"/>
+          </a:fontRef>
+        </p:style>
+      </p:cxnSp>
+      <p:sp>
+        <p:nvSpPr>
+          <p:cNvPr id="34" name="Rounded Rectangle 33"/>
+          <p:cNvSpPr/>
+          <p:nvPr/>
+        </p:nvSpPr>
+        <p:spPr>
+          <a:xfrm>
+            <a:off x="7988808" y="4078224"/>
+            <a:ext cx="1645920" cy="457200"/>
+          </a:xfrm>
+          <a:prstGeom prst="roundRect">
+            <a:avLst/>
+          </a:prstGeom>
+          <a:solidFill>
+            <a:srgbClr val="FFEDD5"/>
+          </a:solidFill>
+          <a:ln w="15875">
+            <a:solidFill>
+              <a:srgbClr val="EA580C"/>
+            </a:solidFill>
+          </a:ln>
+          <a:effectLst/>
+        </p:spPr>
+        <p:style>
+          <a:lnRef idx="1">
+            <a:schemeClr val="accent1"/>
+          </a:lnRef>
+          <a:fillRef idx="3">
+            <a:schemeClr val="accent1"/>
+          </a:fillRef>
+          <a:effectRef idx="2">
+            <a:schemeClr val="accent1"/>
+          </a:effectRef>
+          <a:fontRef idx="minor">
+            <a:schemeClr val="lt1"/>
+          </a:fontRef>
+        </p:style>
+        <p:txBody>
+          <a:bodyPr wrap="square" lIns="36576" tIns="18288" rIns="36576" bIns="18288" rtlCol="0" anchor="ctr"/>
+          <a:lstStyle/>
+          <a:p>
+            <a:pPr algn="ctr"/>
+            <a:r>
+              <a:rPr sz="900" b="1" i="0">
+                <a:solidFill>
+                  <a:srgbClr val="111827"/>
+                </a:solidFill>
+              </a:rPr>
+              <a:t>Senior</a:t>
+            </a:r>
+          </a:p>
+          <a:p>
+            <a:pPr algn="ctr"/>
+            <a:r>
+              <a:rPr sz="900" b="1" i="0">
+                <a:solidFill>
+                  <a:srgbClr val="111827"/>
+                </a:solidFill>
+              </a:rPr>
+              <a:t>agent</a:t>
+            </a:r>
+          </a:p>
+        </p:txBody>
+      </p:sp>
+      <p:cxnSp>
+        <p:nvCxnSpPr>
+          <p:cNvPr id="35" name="Connector 34"/>
+          <p:cNvCxnSpPr/>
+          <p:nvPr/>
+        </p:nvCxnSpPr>
+        <p:spPr>
+          <a:xfrm>
+            <a:off x="6096000" y="3282696"/>
+            <a:ext cx="2715768" cy="795528"/>
+          </a:xfrm>
+          <a:prstGeom prst="line">
+            <a:avLst/>
+          </a:prstGeom>
+          <a:ln w="6350">
+            <a:solidFill>
+              <a:srgbClr val="9CA3AF"/>
+            </a:solidFill>
+            <a:tailEnd type="triangle" w="sm" len="sm"/>
+          </a:ln>
+        </p:spPr>
+        <p:style>
+          <a:lnRef idx="2">
+            <a:schemeClr val="accent1"/>
+          </a:lnRef>
+          <a:fillRef idx="0">
+            <a:schemeClr val="accent1"/>
+          </a:fillRef>
+          <a:effectRef idx="1">
+            <a:schemeClr val="accent1"/>
+          </a:effectRef>
+          <a:fontRef idx="minor">
+            <a:schemeClr val="tx1"/>
+          </a:fontRef>
+        </p:style>
+      </p:cxnSp>
+      <p:sp>
+        <p:nvSpPr>
+          <p:cNvPr id="36" name="Rounded Rectangle 35"/>
+          <p:cNvSpPr/>
+          <p:nvPr/>
+        </p:nvSpPr>
+        <p:spPr>
+          <a:xfrm>
+            <a:off x="9799320" y="4078224"/>
+            <a:ext cx="1645920" cy="457200"/>
+          </a:xfrm>
+          <a:prstGeom prst="roundRect">
+            <a:avLst/>
+          </a:prstGeom>
+          <a:solidFill>
+            <a:srgbClr val="FFEDD5"/>
+          </a:solidFill>
+          <a:ln w="15875">
+            <a:solidFill>
+              <a:srgbClr val="EA580C"/>
+            </a:solidFill>
+          </a:ln>
+          <a:effectLst/>
+        </p:spPr>
+        <p:style>
+          <a:lnRef idx="1">
+            <a:schemeClr val="accent1"/>
+          </a:lnRef>
+          <a:fillRef idx="3">
+            <a:schemeClr val="accent1"/>
+          </a:fillRef>
+          <a:effectRef idx="2">
+            <a:schemeClr val="accent1"/>
+          </a:effectRef>
+          <a:fontRef idx="minor">
+            <a:schemeClr val="lt1"/>
+          </a:fontRef>
+        </p:style>
+        <p:txBody>
+          <a:bodyPr wrap="square" lIns="36576" tIns="18288" rIns="36576" bIns="18288" rtlCol="0" anchor="ctr"/>
+          <a:lstStyle/>
+          <a:p>
+            <a:pPr algn="ctr"/>
+            <a:r>
+              <a:rPr sz="900" b="1" i="0">
+                <a:solidFill>
+                  <a:srgbClr val="111827"/>
+                </a:solidFill>
+              </a:rPr>
+              <a:t>Employment</a:t>
+            </a:r>
+          </a:p>
+          <a:p>
+            <a:pPr algn="ctr"/>
+            <a:r>
+              <a:rPr sz="900" b="1" i="0">
+                <a:solidFill>
+                  <a:srgbClr val="111827"/>
+                </a:solidFill>
+              </a:rPr>
+              <a:t>agent</a:t>
+            </a:r>
+          </a:p>
+        </p:txBody>
+      </p:sp>
+      <p:cxnSp>
+        <p:nvCxnSpPr>
+          <p:cNvPr id="37" name="Connector 36"/>
+          <p:cNvCxnSpPr/>
+          <p:nvPr/>
+        </p:nvCxnSpPr>
+        <p:spPr>
+          <a:xfrm>
+            <a:off x="6096000" y="3282696"/>
+            <a:ext cx="4526280" cy="795528"/>
+          </a:xfrm>
+          <a:prstGeom prst="line">
+            <a:avLst/>
+          </a:prstGeom>
+          <a:ln w="6350">
+            <a:solidFill>
+              <a:srgbClr val="9CA3AF"/>
+            </a:solidFill>
+            <a:tailEnd type="triangle" w="sm" len="sm"/>
+          </a:ln>
+        </p:spPr>
+        <p:style>
+          <a:lnRef idx="2">
+            <a:schemeClr val="accent1"/>
+          </a:lnRef>
+          <a:fillRef idx="0">
+            <a:schemeClr val="accent1"/>
+          </a:fillRef>
+          <a:effectRef idx="1">
+            <a:schemeClr val="accent1"/>
+          </a:effectRef>
+          <a:fontRef idx="minor">
+            <a:schemeClr val="tx1"/>
+          </a:fontRef>
+        </p:style>
+      </p:cxnSp>
+      <p:sp>
+        <p:nvSpPr>
+          <p:cNvPr id="38" name="TextBox 37"/>
+          <p:cNvSpPr txBox="1"/>
+          <p:nvPr/>
+        </p:nvSpPr>
+        <p:spPr>
+          <a:xfrm>
+            <a:off x="746759" y="4581144"/>
+            <a:ext cx="10698480" cy="201168"/>
+          </a:xfrm>
+          <a:prstGeom prst="rect">
+            <a:avLst/>
+          </a:prstGeom>
+          <a:noFill/>
+        </p:spPr>
+        <p:txBody>
+          <a:bodyPr wrap="square" lIns="18288" tIns="0" rIns="18288" bIns="0">
+            <a:spAutoFit/>
+          </a:bodyPr>
+          <a:lstStyle/>
+          <a:p>
+            <a:pPr algn="ctr"/>
+            <a:r>
+              <a:rPr sz="900" i="1">
+                <a:solidFill>
+                  <a:srgbClr val="6B7280"/>
+                </a:solidFill>
+              </a:rPr>
+              <a:t>Each agent uses a category-filtered retriever as a CrewAI Tool (dense + HyDE + BM25 + RRF) — Topic 5.5 §Tools</a:t>
+            </a:r>
+          </a:p>
+        </p:txBody>
+      </p:sp>
+      <p:sp>
+        <p:nvSpPr>
+          <p:cNvPr id="39" name="Rounded Rectangle 38"/>
+          <p:cNvSpPr/>
+          <p:nvPr/>
+        </p:nvSpPr>
+        <p:spPr>
+          <a:xfrm>
+            <a:off x="2575560" y="4855464"/>
+            <a:ext cx="3291840" cy="502920"/>
+          </a:xfrm>
+          <a:prstGeom prst="roundRect">
+            <a:avLst/>
+          </a:prstGeom>
+          <a:solidFill>
+            <a:srgbClr val="FFEDD5"/>
+          </a:solidFill>
+          <a:ln w="15875">
+            <a:solidFill>
+              <a:srgbClr val="EA580C"/>
+            </a:solidFill>
+          </a:ln>
+          <a:effectLst/>
+        </p:spPr>
+        <p:style>
+          <a:lnRef idx="1">
+            <a:schemeClr val="accent1"/>
+          </a:lnRef>
+          <a:fillRef idx="3">
+            <a:schemeClr val="accent1"/>
+          </a:fillRef>
+          <a:effectRef idx="2">
+            <a:schemeClr val="accent1"/>
+          </a:effectRef>
+          <a:fontRef idx="minor">
+            <a:schemeClr val="lt1"/>
+          </a:fontRef>
+        </p:style>
+        <p:txBody>
+          <a:bodyPr wrap="square" lIns="36576" tIns="18288" rIns="36576" bIns="18288" rtlCol="0" anchor="ctr"/>
+          <a:lstStyle/>
+          <a:p>
+            <a:pPr algn="ctr"/>
+            <a:r>
+              <a:rPr sz="1000" b="1" i="0">
+                <a:solidFill>
+                  <a:srgbClr val="111827"/>
+                </a:solidFill>
+              </a:rPr>
+              <a:t>AGGREGATOR Agent (#14)</a:t>
+            </a:r>
+          </a:p>
+          <a:p>
+            <a:pPr algn="ctr"/>
+            <a:r>
+              <a:rPr sz="1000" b="1" i="0">
+                <a:solidFill>
+                  <a:srgbClr val="111827"/>
+                </a:solidFill>
+              </a:rPr>
+              <a:t>ranks top-5 with verbatim citations</a:t>
+            </a:r>
+          </a:p>
+        </p:txBody>
+      </p:sp>
+      <p:sp>
+        <p:nvSpPr>
+          <p:cNvPr id="40" name="Rounded Rectangle 39"/>
+          <p:cNvSpPr/>
+          <p:nvPr/>
+        </p:nvSpPr>
+        <p:spPr>
+          <a:xfrm>
+            <a:off x="6324600" y="4855464"/>
+            <a:ext cx="3291840" cy="502920"/>
+          </a:xfrm>
+          <a:prstGeom prst="roundRect">
+            <a:avLst/>
+          </a:prstGeom>
+          <a:solidFill>
+            <a:srgbClr val="FFEDD5"/>
+          </a:solidFill>
+          <a:ln w="15875">
+            <a:solidFill>
+              <a:srgbClr val="EA580C"/>
+            </a:solidFill>
+          </a:ln>
+          <a:effectLst/>
+        </p:spPr>
+        <p:style>
+          <a:lnRef idx="1">
+            <a:schemeClr val="accent1"/>
+          </a:lnRef>
+          <a:fillRef idx="3">
+            <a:schemeClr val="accent1"/>
+          </a:fillRef>
+          <a:effectRef idx="2">
+            <a:schemeClr val="accent1"/>
+          </a:effectRef>
+          <a:fontRef idx="minor">
+            <a:schemeClr val="lt1"/>
+          </a:fontRef>
+        </p:style>
+        <p:txBody>
+          <a:bodyPr wrap="square" lIns="36576" tIns="18288" rIns="36576" bIns="18288" rtlCol="0" anchor="ctr"/>
+          <a:lstStyle/>
+          <a:p>
+            <a:pPr algn="ctr"/>
+            <a:r>
+              <a:rPr sz="900" b="1" i="0">
+                <a:solidFill>
+                  <a:srgbClr val="111827"/>
+                </a:solidFill>
+              </a:rPr>
+              <a:t>CASE DOCUMENTATION OFFICER Agent (#15)</a:t>
+            </a:r>
+          </a:p>
+          <a:p>
+            <a:pPr algn="ctr"/>
+            <a:r>
+              <a:rPr sz="900" b="1" i="0">
+                <a:solidFill>
+                  <a:srgbClr val="111827"/>
+                </a:solidFill>
+              </a:rPr>
+              <a:t>plain-English summary (family + record)</a:t>
+            </a:r>
+          </a:p>
+        </p:txBody>
+      </p:sp>
+      <p:sp>
+        <p:nvSpPr>
+          <p:cNvPr id="41" name="TextBox 40"/>
+          <p:cNvSpPr txBox="1"/>
+          <p:nvPr/>
+        </p:nvSpPr>
+        <p:spPr>
+          <a:xfrm>
+            <a:off x="9753600" y="4946903"/>
+            <a:ext cx="2286000" cy="502920"/>
+          </a:xfrm>
+          <a:prstGeom prst="rect">
+            <a:avLst/>
+          </a:prstGeom>
+          <a:noFill/>
+        </p:spPr>
+        <p:txBody>
+          <a:bodyPr wrap="square" lIns="18288" tIns="0" rIns="18288" bIns="0">
+            <a:spAutoFit/>
+          </a:bodyPr>
+          <a:lstStyle/>
+          <a:p>
+            <a:pPr algn="l"/>
+            <a:r>
+              <a:rPr sz="900" i="1">
+                <a:solidFill>
+                  <a:srgbClr val="6B7280"/>
+                </a:solidFill>
+              </a:rPr>
+              <a:t>← 2 LLM calls
+(Aggregator, then Docs)</a:t>
+            </a:r>
+          </a:p>
+        </p:txBody>
+      </p:sp>
+      <p:cxnSp>
+        <p:nvCxnSpPr>
+          <p:cNvPr id="42" name="Connector 41"/>
+          <p:cNvCxnSpPr/>
+          <p:nvPr/>
+        </p:nvCxnSpPr>
+        <p:spPr>
+          <a:xfrm>
+            <a:off x="1569719" y="3968496"/>
+            <a:ext cx="2651761" cy="886968"/>
+          </a:xfrm>
+          <a:prstGeom prst="line">
+            <a:avLst/>
+          </a:prstGeom>
+          <a:ln w="6350">
+            <a:solidFill>
+              <a:srgbClr val="9CA3AF"/>
+            </a:solidFill>
+            <a:tailEnd type="triangle" w="sm" len="sm"/>
+          </a:ln>
+        </p:spPr>
+        <p:style>
+          <a:lnRef idx="2">
+            <a:schemeClr val="accent1"/>
+          </a:lnRef>
+          <a:fillRef idx="0">
+            <a:schemeClr val="accent1"/>
+          </a:fillRef>
+          <a:effectRef idx="1">
+            <a:schemeClr val="accent1"/>
+          </a:effectRef>
+          <a:fontRef idx="minor">
+            <a:schemeClr val="tx1"/>
+          </a:fontRef>
+        </p:style>
+      </p:cxnSp>
+      <p:cxnSp>
+        <p:nvCxnSpPr>
+          <p:cNvPr id="43" name="Connector 42"/>
+          <p:cNvCxnSpPr/>
+          <p:nvPr/>
+        </p:nvCxnSpPr>
+        <p:spPr>
+          <a:xfrm>
+            <a:off x="3380231" y="3968496"/>
+            <a:ext cx="841249" cy="886968"/>
+          </a:xfrm>
+          <a:prstGeom prst="line">
+            <a:avLst/>
+          </a:prstGeom>
+          <a:ln w="6350">
+            <a:solidFill>
+              <a:srgbClr val="9CA3AF"/>
+            </a:solidFill>
+            <a:tailEnd type="triangle" w="sm" len="sm"/>
+          </a:ln>
+        </p:spPr>
+        <p:style>
+          <a:lnRef idx="2">
+            <a:schemeClr val="accent1"/>
+          </a:lnRef>
+          <a:fillRef idx="0">
+            <a:schemeClr val="accent1"/>
+          </a:fillRef>
+          <a:effectRef idx="1">
+            <a:schemeClr val="accent1"/>
+          </a:effectRef>
+          <a:fontRef idx="minor">
+            <a:schemeClr val="tx1"/>
+          </a:fontRef>
+        </p:style>
+      </p:cxnSp>
+      <p:cxnSp>
+        <p:nvCxnSpPr>
+          <p:cNvPr id="44" name="Connector 43"/>
+          <p:cNvCxnSpPr/>
+          <p:nvPr/>
+        </p:nvCxnSpPr>
+        <p:spPr>
+          <a:xfrm flipH="1">
+            <a:off x="4221480" y="3968496"/>
+            <a:ext cx="969264" cy="886968"/>
+          </a:xfrm>
+          <a:prstGeom prst="line">
+            <a:avLst/>
+          </a:prstGeom>
+          <a:ln w="6350">
+            <a:solidFill>
+              <a:srgbClr val="9CA3AF"/>
+            </a:solidFill>
+            <a:tailEnd type="triangle" w="sm" len="sm"/>
+          </a:ln>
+        </p:spPr>
+        <p:style>
+          <a:lnRef idx="2">
+            <a:schemeClr val="accent1"/>
+          </a:lnRef>
+          <a:fillRef idx="0">
+            <a:schemeClr val="accent1"/>
+          </a:fillRef>
+          <a:effectRef idx="1">
+            <a:schemeClr val="accent1"/>
+          </a:effectRef>
+          <a:fontRef idx="minor">
+            <a:schemeClr val="tx1"/>
+          </a:fontRef>
+        </p:style>
+      </p:cxnSp>
+      <p:cxnSp>
+        <p:nvCxnSpPr>
+          <p:cNvPr id="45" name="Connector 44"/>
+          <p:cNvCxnSpPr/>
+          <p:nvPr/>
+        </p:nvCxnSpPr>
+        <p:spPr>
+          <a:xfrm flipH="1">
+            <a:off x="4221480" y="3968496"/>
+            <a:ext cx="2779776" cy="886968"/>
+          </a:xfrm>
+          <a:prstGeom prst="line">
+            <a:avLst/>
+          </a:prstGeom>
+          <a:ln w="6350">
+            <a:solidFill>
+              <a:srgbClr val="9CA3AF"/>
+            </a:solidFill>
+            <a:tailEnd type="triangle" w="sm" len="sm"/>
+          </a:ln>
+        </p:spPr>
+        <p:style>
+          <a:lnRef idx="2">
+            <a:schemeClr val="accent1"/>
+          </a:lnRef>
+          <a:fillRef idx="0">
+            <a:schemeClr val="accent1"/>
+          </a:fillRef>
+          <a:effectRef idx="1">
+            <a:schemeClr val="accent1"/>
+          </a:effectRef>
+          <a:fontRef idx="minor">
+            <a:schemeClr val="tx1"/>
+          </a:fontRef>
+        </p:style>
+      </p:cxnSp>
+      <p:cxnSp>
+        <p:nvCxnSpPr>
+          <p:cNvPr id="46" name="Connector 45"/>
+          <p:cNvCxnSpPr/>
+          <p:nvPr/>
+        </p:nvCxnSpPr>
+        <p:spPr>
+          <a:xfrm flipH="1">
+            <a:off x="4221480" y="3968496"/>
+            <a:ext cx="4590288" cy="886968"/>
+          </a:xfrm>
+          <a:prstGeom prst="line">
+            <a:avLst/>
+          </a:prstGeom>
+          <a:ln w="6350">
+            <a:solidFill>
+              <a:srgbClr val="9CA3AF"/>
+            </a:solidFill>
+            <a:tailEnd type="triangle" w="sm" len="sm"/>
+          </a:ln>
+        </p:spPr>
+        <p:style>
+          <a:lnRef idx="2">
+            <a:schemeClr val="accent1"/>
+          </a:lnRef>
+          <a:fillRef idx="0">
+            <a:schemeClr val="accent1"/>
+          </a:fillRef>
+          <a:effectRef idx="1">
+            <a:schemeClr val="accent1"/>
+          </a:effectRef>
+          <a:fontRef idx="minor">
+            <a:schemeClr val="tx1"/>
+          </a:fontRef>
+        </p:style>
+      </p:cxnSp>
+      <p:cxnSp>
+        <p:nvCxnSpPr>
+          <p:cNvPr id="47" name="Connector 46"/>
+          <p:cNvCxnSpPr/>
+          <p:nvPr/>
+        </p:nvCxnSpPr>
+        <p:spPr>
+          <a:xfrm flipH="1">
+            <a:off x="4221480" y="3968496"/>
+            <a:ext cx="6400800" cy="886968"/>
+          </a:xfrm>
+          <a:prstGeom prst="line">
+            <a:avLst/>
+          </a:prstGeom>
+          <a:ln w="6350">
+            <a:solidFill>
+              <a:srgbClr val="9CA3AF"/>
+            </a:solidFill>
+            <a:tailEnd type="triangle" w="sm" len="sm"/>
+          </a:ln>
+        </p:spPr>
+        <p:style>
+          <a:lnRef idx="2">
+            <a:schemeClr val="accent1"/>
+          </a:lnRef>
+          <a:fillRef idx="0">
+            <a:schemeClr val="accent1"/>
+          </a:fillRef>
+          <a:effectRef idx="1">
+            <a:schemeClr val="accent1"/>
+          </a:effectRef>
+          <a:fontRef idx="minor">
+            <a:schemeClr val="tx1"/>
+          </a:fontRef>
+        </p:style>
+      </p:cxnSp>
+      <p:cxnSp>
+        <p:nvCxnSpPr>
+          <p:cNvPr id="48" name="Connector 47"/>
+          <p:cNvCxnSpPr/>
+          <p:nvPr/>
+        </p:nvCxnSpPr>
+        <p:spPr>
+          <a:xfrm>
+            <a:off x="1569719" y="4535424"/>
+            <a:ext cx="2651761" cy="320040"/>
+          </a:xfrm>
+          <a:prstGeom prst="line">
+            <a:avLst/>
+          </a:prstGeom>
+          <a:ln w="6350">
+            <a:solidFill>
+              <a:srgbClr val="9CA3AF"/>
+            </a:solidFill>
+            <a:tailEnd type="triangle" w="sm" len="sm"/>
+          </a:ln>
+        </p:spPr>
+        <p:style>
+          <a:lnRef idx="2">
+            <a:schemeClr val="accent1"/>
+          </a:lnRef>
+          <a:fillRef idx="0">
+            <a:schemeClr val="accent1"/>
+          </a:fillRef>
+          <a:effectRef idx="1">
+            <a:schemeClr val="accent1"/>
+          </a:effectRef>
+          <a:fontRef idx="minor">
+            <a:schemeClr val="tx1"/>
+          </a:fontRef>
+        </p:style>
+      </p:cxnSp>
+      <p:cxnSp>
+        <p:nvCxnSpPr>
+          <p:cNvPr id="49" name="Connector 48"/>
+          <p:cNvCxnSpPr/>
+          <p:nvPr/>
+        </p:nvCxnSpPr>
+        <p:spPr>
+          <a:xfrm>
+            <a:off x="3380231" y="4535424"/>
+            <a:ext cx="841249" cy="320040"/>
+          </a:xfrm>
+          <a:prstGeom prst="line">
+            <a:avLst/>
+          </a:prstGeom>
+          <a:ln w="6350">
+            <a:solidFill>
+              <a:srgbClr val="9CA3AF"/>
+            </a:solidFill>
+            <a:tailEnd type="triangle" w="sm" len="sm"/>
+          </a:ln>
+        </p:spPr>
+        <p:style>
+          <a:lnRef idx="2">
+            <a:schemeClr val="accent1"/>
+          </a:lnRef>
+          <a:fillRef idx="0">
+            <a:schemeClr val="accent1"/>
+          </a:fillRef>
+          <a:effectRef idx="1">
+            <a:schemeClr val="accent1"/>
+          </a:effectRef>
+          <a:fontRef idx="minor">
+            <a:schemeClr val="tx1"/>
+          </a:fontRef>
+        </p:style>
+      </p:cxnSp>
+      <p:cxnSp>
+        <p:nvCxnSpPr>
+          <p:cNvPr id="50" name="Connector 49"/>
+          <p:cNvCxnSpPr/>
+          <p:nvPr/>
+        </p:nvCxnSpPr>
+        <p:spPr>
+          <a:xfrm flipH="1">
+            <a:off x="4221480" y="4535424"/>
+            <a:ext cx="969264" cy="320040"/>
+          </a:xfrm>
+          <a:prstGeom prst="line">
+            <a:avLst/>
+          </a:prstGeom>
+          <a:ln w="6350">
+            <a:solidFill>
+              <a:srgbClr val="9CA3AF"/>
+            </a:solidFill>
+            <a:tailEnd type="triangle" w="sm" len="sm"/>
+          </a:ln>
+        </p:spPr>
+        <p:style>
+          <a:lnRef idx="2">
+            <a:schemeClr val="accent1"/>
+          </a:lnRef>
+          <a:fillRef idx="0">
+            <a:schemeClr val="accent1"/>
+          </a:fillRef>
+          <a:effectRef idx="1">
+            <a:schemeClr val="accent1"/>
+          </a:effectRef>
+          <a:fontRef idx="minor">
+            <a:schemeClr val="tx1"/>
+          </a:fontRef>
+        </p:style>
+      </p:cxnSp>
+      <p:cxnSp>
+        <p:nvCxnSpPr>
+          <p:cNvPr id="51" name="Connector 50"/>
+          <p:cNvCxnSpPr/>
+          <p:nvPr/>
+        </p:nvCxnSpPr>
+        <p:spPr>
+          <a:xfrm flipH="1">
+            <a:off x="4221480" y="4535424"/>
+            <a:ext cx="2779776" cy="320040"/>
+          </a:xfrm>
+          <a:prstGeom prst="line">
+            <a:avLst/>
+          </a:prstGeom>
+          <a:ln w="6350">
+            <a:solidFill>
+              <a:srgbClr val="9CA3AF"/>
+            </a:solidFill>
+            <a:tailEnd type="triangle" w="sm" len="sm"/>
+          </a:ln>
+        </p:spPr>
+        <p:style>
+          <a:lnRef idx="2">
+            <a:schemeClr val="accent1"/>
+          </a:lnRef>
+          <a:fillRef idx="0">
+            <a:schemeClr val="accent1"/>
+          </a:fillRef>
+          <a:effectRef idx="1">
+            <a:schemeClr val="accent1"/>
+          </a:effectRef>
+          <a:fontRef idx="minor">
+            <a:schemeClr val="tx1"/>
+          </a:fontRef>
+        </p:style>
+      </p:cxnSp>
+      <p:cxnSp>
+        <p:nvCxnSpPr>
+          <p:cNvPr id="52" name="Connector 51"/>
+          <p:cNvCxnSpPr/>
+          <p:nvPr/>
+        </p:nvCxnSpPr>
+        <p:spPr>
+          <a:xfrm flipH="1">
+            <a:off x="4221480" y="4535424"/>
+            <a:ext cx="4590288" cy="320040"/>
+          </a:xfrm>
+          <a:prstGeom prst="line">
+            <a:avLst/>
+          </a:prstGeom>
+          <a:ln w="6350">
+            <a:solidFill>
+              <a:srgbClr val="9CA3AF"/>
+            </a:solidFill>
+            <a:tailEnd type="triangle" w="sm" len="sm"/>
+          </a:ln>
+        </p:spPr>
+        <p:style>
+          <a:lnRef idx="2">
+            <a:schemeClr val="accent1"/>
+          </a:lnRef>
+          <a:fillRef idx="0">
+            <a:schemeClr val="accent1"/>
+          </a:fillRef>
+          <a:effectRef idx="1">
+            <a:schemeClr val="accent1"/>
+          </a:effectRef>
+          <a:fontRef idx="minor">
+            <a:schemeClr val="tx1"/>
+          </a:fontRef>
+        </p:style>
+      </p:cxnSp>
+      <p:cxnSp>
+        <p:nvCxnSpPr>
+          <p:cNvPr id="53" name="Connector 52"/>
+          <p:cNvCxnSpPr/>
+          <p:nvPr/>
+        </p:nvCxnSpPr>
+        <p:spPr>
+          <a:xfrm flipH="1">
+            <a:off x="4221480" y="4535424"/>
+            <a:ext cx="6400800" cy="320040"/>
+          </a:xfrm>
+          <a:prstGeom prst="line">
+            <a:avLst/>
+          </a:prstGeom>
+          <a:ln w="6350">
+            <a:solidFill>
+              <a:srgbClr val="9CA3AF"/>
+            </a:solidFill>
+            <a:tailEnd type="triangle" w="sm" len="sm"/>
+          </a:ln>
+        </p:spPr>
+        <p:style>
+          <a:lnRef idx="2">
+            <a:schemeClr val="accent1"/>
+          </a:lnRef>
+          <a:fillRef idx="0">
+            <a:schemeClr val="accent1"/>
+          </a:fillRef>
+          <a:effectRef idx="1">
+            <a:schemeClr val="accent1"/>
+          </a:effectRef>
+          <a:fontRef idx="minor">
+            <a:schemeClr val="tx1"/>
+          </a:fontRef>
+        </p:style>
+      </p:cxnSp>
+      <p:cxnSp>
+        <p:nvCxnSpPr>
+          <p:cNvPr id="54" name="Connector 53"/>
+          <p:cNvCxnSpPr/>
+          <p:nvPr/>
+        </p:nvCxnSpPr>
+        <p:spPr>
+          <a:xfrm>
+            <a:off x="5867400" y="5106924"/>
+            <a:ext cx="457200" cy="0"/>
+          </a:xfrm>
+          <a:prstGeom prst="line">
+            <a:avLst/>
+          </a:prstGeom>
+          <a:ln w="15240">
+            <a:solidFill>
+              <a:srgbClr val="4B5563"/>
+            </a:solidFill>
+            <a:tailEnd type="triangle" w="med" len="med"/>
+          </a:ln>
+        </p:spPr>
+        <p:style>
+          <a:lnRef idx="2">
+            <a:schemeClr val="accent1"/>
+          </a:lnRef>
+          <a:fillRef idx="0">
+            <a:schemeClr val="accent1"/>
+          </a:fillRef>
+          <a:effectRef idx="1">
+            <a:schemeClr val="accent1"/>
+          </a:effectRef>
+          <a:fontRef idx="minor">
+            <a:schemeClr val="tx1"/>
+          </a:fontRef>
+        </p:style>
+      </p:cxnSp>
+      <p:sp>
+        <p:nvSpPr>
+          <p:cNvPr id="55" name="TextBox 54"/>
+          <p:cNvSpPr txBox="1"/>
+          <p:nvPr/>
+        </p:nvSpPr>
+        <p:spPr>
+          <a:xfrm>
+            <a:off x="11582400" y="3557015"/>
+            <a:ext cx="2560320" cy="777240"/>
+          </a:xfrm>
+          <a:prstGeom prst="rect">
+            <a:avLst/>
+          </a:prstGeom>
+          <a:noFill/>
+        </p:spPr>
+        <p:txBody>
+          <a:bodyPr wrap="square" lIns="18288" tIns="0" rIns="18288" bIns="0">
+            <a:spAutoFit/>
+          </a:bodyPr>
+          <a:lstStyle/>
+          <a:p>
+            <a:pPr algn="l"/>
+            <a:r>
+              <a:rPr sz="900" i="1">
+                <a:solidFill>
+                  <a:srgbClr val="6B7280"/>
+                </a:solidFill>
+              </a:rPr>
+              <a:t>Only the 2–4 agents
+picked by the Triaging
+Agent actually run
+(in parallel).</a:t>
+            </a:r>
+          </a:p>
+        </p:txBody>
+      </p:sp>
+      <p:cxnSp>
+        <p:nvCxnSpPr>
+          <p:cNvPr id="56" name="Connector 55"/>
+          <p:cNvCxnSpPr/>
+          <p:nvPr/>
+        </p:nvCxnSpPr>
+        <p:spPr>
+          <a:xfrm>
+            <a:off x="6096000" y="5660136"/>
+            <a:ext cx="0" cy="164591"/>
+          </a:xfrm>
+          <a:prstGeom prst="line">
+            <a:avLst/>
+          </a:prstGeom>
+          <a:ln w="19050">
+            <a:solidFill>
+              <a:srgbClr val="4B5563"/>
+            </a:solidFill>
+            <a:tailEnd type="triangle" w="med" len="med"/>
+          </a:ln>
+        </p:spPr>
+        <p:style>
+          <a:lnRef idx="2">
+            <a:schemeClr val="accent1"/>
+          </a:lnRef>
+          <a:fillRef idx="0">
+            <a:schemeClr val="accent1"/>
+          </a:fillRef>
+          <a:effectRef idx="1">
+            <a:schemeClr val="accent1"/>
+          </a:effectRef>
+          <a:fontRef idx="minor">
+            <a:schemeClr val="tx1"/>
+          </a:fontRef>
+        </p:style>
+      </p:cxnSp>
+      <p:sp>
+        <p:nvSpPr>
+          <p:cNvPr id="57" name="Rounded Rectangle 56"/>
+          <p:cNvSpPr/>
+          <p:nvPr/>
+        </p:nvSpPr>
+        <p:spPr>
+          <a:xfrm>
+            <a:off x="4724400" y="5824727"/>
+            <a:ext cx="2743200" cy="347472"/>
+          </a:xfrm>
+          <a:prstGeom prst="roundRect">
+            <a:avLst/>
+          </a:prstGeom>
+          <a:solidFill>
+            <a:srgbClr val="E7FBE7"/>
+          </a:solidFill>
+          <a:ln w="15875">
+            <a:solidFill>
+              <a:srgbClr val="16A34A"/>
+            </a:solidFill>
+          </a:ln>
+          <a:effectLst/>
+        </p:spPr>
+        <p:style>
+          <a:lnRef idx="1">
+            <a:schemeClr val="accent1"/>
+          </a:lnRef>
+          <a:fillRef idx="3">
+            <a:schemeClr val="accent1"/>
+          </a:fillRef>
+          <a:effectRef idx="2">
+            <a:schemeClr val="accent1"/>
+          </a:effectRef>
+          <a:fontRef idx="minor">
+            <a:schemeClr val="lt1"/>
+          </a:fontRef>
+        </p:style>
+        <p:txBody>
+          <a:bodyPr wrap="square" lIns="36576" tIns="18288" rIns="36576" bIns="18288" rtlCol="0" anchor="ctr"/>
+          <a:lstStyle/>
+          <a:p>
+            <a:pPr algn="ctr"/>
+            <a:r>
+              <a:rPr sz="1000" b="1" i="0">
+                <a:solidFill>
+                  <a:srgbClr val="111827"/>
+                </a:solidFill>
+              </a:rPr>
+              <a:t>Faithfulness Audit (Topic 4.4)</a:t>
+            </a:r>
+          </a:p>
+        </p:txBody>
+      </p:sp>
+      <p:cxnSp>
+        <p:nvCxnSpPr>
+          <p:cNvPr id="58" name="Connector 57"/>
+          <p:cNvCxnSpPr/>
+          <p:nvPr/>
+        </p:nvCxnSpPr>
+        <p:spPr>
+          <a:xfrm>
+            <a:off x="6096000" y="6172199"/>
+            <a:ext cx="0" cy="109728"/>
+          </a:xfrm>
+          <a:prstGeom prst="line">
+            <a:avLst/>
+          </a:prstGeom>
+          <a:ln w="19050">
+            <a:solidFill>
+              <a:srgbClr val="4B5563"/>
+            </a:solidFill>
+            <a:tailEnd type="triangle" w="med" len="med"/>
+          </a:ln>
+        </p:spPr>
+        <p:style>
+          <a:lnRef idx="2">
+            <a:schemeClr val="accent1"/>
+          </a:lnRef>
+          <a:fillRef idx="0">
+            <a:schemeClr val="accent1"/>
+          </a:fillRef>
+          <a:effectRef idx="1">
+            <a:schemeClr val="accent1"/>
+          </a:effectRef>
+          <a:fontRef idx="minor">
+            <a:schemeClr val="tx1"/>
+          </a:fontRef>
+        </p:style>
+      </p:cxnSp>
+      <p:sp>
+        <p:nvSpPr>
+          <p:cNvPr id="59" name="Rounded Rectangle 58"/>
+          <p:cNvSpPr/>
+          <p:nvPr/>
+        </p:nvSpPr>
+        <p:spPr>
+          <a:xfrm>
+            <a:off x="4724400" y="6281927"/>
+            <a:ext cx="2743200" cy="347472"/>
+          </a:xfrm>
+          <a:prstGeom prst="roundRect">
+            <a:avLst/>
+          </a:prstGeom>
+          <a:solidFill>
+            <a:srgbClr val="F3F4F6"/>
+          </a:solidFill>
+          <a:ln w="15875">
+            <a:solidFill>
+              <a:srgbClr val="6B7280"/>
+            </a:solidFill>
+          </a:ln>
+          <a:effectLst/>
+        </p:spPr>
+        <p:style>
+          <a:lnRef idx="1">
+            <a:schemeClr val="accent1"/>
+          </a:lnRef>
+          <a:fillRef idx="3">
+            <a:schemeClr val="accent1"/>
+          </a:fillRef>
+          <a:effectRef idx="2">
+            <a:schemeClr val="accent1"/>
+          </a:effectRef>
+          <a:fontRef idx="minor">
+            <a:schemeClr val="lt1"/>
+          </a:fontRef>
+        </p:style>
+        <p:txBody>
+          <a:bodyPr wrap="square" lIns="36576" tIns="18288" rIns="36576" bIns="18288" rtlCol="0" anchor="ctr"/>
+          <a:lstStyle/>
+          <a:p>
+            <a:pPr algn="ctr"/>
+            <a:r>
+              <a:rPr sz="1000" b="1" i="0">
+                <a:solidFill>
+                  <a:srgbClr val="111827"/>
+                </a:solidFill>
+              </a:rPr>
+              <a:t>SAO reviews (HITL — end-of-crew)</a:t>
+            </a:r>
+          </a:p>
+        </p:txBody>
+      </p:sp>
+      <p:sp>
+        <p:nvSpPr>
+          <p:cNvPr id="60" name="TextBox 59"/>
+          <p:cNvSpPr txBox="1"/>
+          <p:nvPr/>
+        </p:nvSpPr>
+        <p:spPr>
+          <a:xfrm>
+            <a:off x="457200" y="6492240"/>
+            <a:ext cx="11277600" cy="274320"/>
+          </a:xfrm>
+          <a:prstGeom prst="rect">
+            <a:avLst/>
+          </a:prstGeom>
+          <a:noFill/>
+        </p:spPr>
+        <p:txBody>
+          <a:bodyPr wrap="square" lIns="36576" tIns="18288" rIns="36576" bIns="18288" anchor="ctr">
+            <a:spAutoFit/>
+          </a:bodyPr>
+          <a:lstStyle/>
+          <a:p>
+            <a:pPr algn="ctr"/>
+            <a:r>
+              <a:rPr sz="900" b="0" i="1">
+                <a:solidFill>
+                  <a:srgbClr val="6B7280"/>
+                </a:solidFill>
+              </a:rPr>
+              <a:t>Fast single-shot RAG (v1.3) remains the production default. Deep Mode opt-in via sidebar toggle. ~$0.02/query · ~25-30 sec · Topic 5.5 mastery demonstrated.</a:t>
+            </a:r>
+          </a:p>
+        </p:txBody>
+      </p:sp>
+      <p:sp>
+        <p:nvSpPr>
+          <p:cNvPr id="61" name="Star: 6 Points 60">
+            <a:extLst>
+              <a:ext uri="{FF2B5EF4-FFF2-40B4-BE49-F238E27FC236}">
+                <a16:creationId xmlns:a16="http://schemas.microsoft.com/office/drawing/2014/main" id="{FEC961F9-B832-90DF-85A5-F01EB488AF27}"/>
+              </a:ext>
+            </a:extLst>
+          </p:cNvPr>
+          <p:cNvSpPr/>
+          <p:nvPr/>
+        </p:nvSpPr>
+        <p:spPr>
+          <a:xfrm>
+            <a:off x="8894063" y="4517136"/>
+            <a:ext cx="1250623" cy="502919"/>
+          </a:xfrm>
+          <a:prstGeom prst="star6">
+            <a:avLst/>
+          </a:prstGeom>
+        </p:spPr>
+        <p:style>
+          <a:lnRef idx="1">
+            <a:schemeClr val="accent1"/>
+          </a:lnRef>
+          <a:fillRef idx="3">
+            <a:schemeClr val="accent1"/>
+          </a:fillRef>
+          <a:effectRef idx="2">
+            <a:schemeClr val="accent1"/>
+          </a:effectRef>
+          <a:fontRef idx="minor">
+            <a:schemeClr val="lt1"/>
+          </a:fontRef>
+        </p:style>
+        <p:txBody>
+          <a:bodyPr rtlCol="0" anchor="ctr"/>
+          <a:lstStyle/>
+          <a:p>
+            <a:pPr algn="ctr"/>
+            <a:r>
+              <a:rPr lang="en-SG" sz="1600" dirty="0"/>
+              <a:t>new</a:t>
+            </a:r>
+          </a:p>
+        </p:txBody>
+      </p:sp>
+    </p:spTree>
+  </p:cSld>
+  <p:clrMapOvr>
+    <a:masterClrMapping/>
+  </p:clrMapOvr>
+</p:sld>
+</file>
+
 <file path=ppt/slides/slide2.xml><?xml version="1.0" encoding="utf-8"?>
 <p:sld xmlns:a="http://schemas.openxmlformats.org/drawingml/2006/main" xmlns:r="http://schemas.openxmlformats.org/officeDocument/2006/relationships" xmlns:p="http://schemas.openxmlformats.org/presentationml/2006/main">
   <p:cSld>
@@ -7453,23 +10545,26 @@
             </a:endParaRPr>
           </a:p>
           <a:p>
-            <a:pPr marL="0" marR="0" lvl="0" indent="0" algn="l" defTabSz="457200" rtl="0" eaLnBrk="1" fontAlgn="auto" latinLnBrk="0" hangingPunct="1">
-              <a:lnSpc>
-                <a:spcPct val="100000"/>
-              </a:lnSpc>
-              <a:spcBef>
-                <a:spcPts val="0"/>
-              </a:spcBef>
-              <a:spcAft>
-                <a:spcPts val="0"/>
-              </a:spcAft>
-              <a:buClrTx/>
-              <a:buSzTx/>
-              <a:buFontTx/>
-              <a:buNone/>
-              <a:tabLst/>
+            <a:pPr lvl="0">
               <a:defRPr/>
             </a:pPr>
+            <a:r>
+              <a:rPr kumimoji="0" lang="en-GB" sz="1100" b="1" i="0" u="none" strike="noStrike" kern="1200" cap="none" spc="0" normalizeH="0" baseline="0" noProof="0" dirty="0">
+                <a:ln>
+                  <a:noFill/>
+                </a:ln>
+                <a:solidFill>
+                  <a:srgbClr val="A00000"/>
+                </a:solidFill>
+                <a:effectLst/>
+                <a:uLnTx/>
+                <a:uFillTx/>
+                <a:latin typeface="Calibri"/>
+                <a:ea typeface="+mn-ea"/>
+                <a:cs typeface="+mn-cs"/>
+              </a:rPr>
+              <a:t>Welfare officers are</a:t>
+            </a:r>
             <a:r>
               <a:rPr kumimoji="0" sz="1100" b="1" i="0" u="none" strike="noStrike" kern="1200" cap="none" spc="0" normalizeH="0" baseline="0" noProof="0" dirty="0">
                 <a:ln>
@@ -7485,10 +10580,10 @@
                 <a:ea typeface="+mn-ea"/>
                 <a:cs typeface="+mn-cs"/>
               </a:rPr>
-              <a:t>SAO is mentally taxed to determine which of the many MSF </a:t>
-            </a:r>
-            <a:r>
-              <a:rPr kumimoji="0" sz="1100" b="1" i="0" u="none" strike="noStrike" kern="1200" cap="none" spc="0" normalizeH="0" baseline="0" noProof="0" dirty="0" err="1">
+              <a:t> mentally taxed to determine which of the many </a:t>
+            </a:r>
+            <a:r>
+              <a:rPr kumimoji="0" lang="en-GB" sz="1100" b="1" i="0" u="none" strike="noStrike" kern="1200" cap="none" spc="0" normalizeH="0" baseline="0" noProof="0" dirty="0">
                 <a:ln>
                   <a:noFill/>
                 </a:ln>
@@ -7502,7 +10597,49 @@
                 <a:ea typeface="+mn-ea"/>
                 <a:cs typeface="+mn-cs"/>
               </a:rPr>
-              <a:t>programmes</a:t>
+              <a:t>welfare resources in public </a:t>
+            </a:r>
+            <a:r>
+              <a:rPr lang="en-GB" sz="1100" b="1" dirty="0">
+                <a:solidFill>
+                  <a:srgbClr val="A00000"/>
+                </a:solidFill>
+              </a:rPr>
+              <a:t>website (</a:t>
+            </a:r>
+            <a:r>
+              <a:rPr lang="en-GB" sz="1100" b="1" dirty="0">
+                <a:solidFill>
+                  <a:srgbClr val="A00000"/>
+                </a:solidFill>
+                <a:hlinkClick r:id="rId2"/>
+              </a:rPr>
+              <a:t>https://supportgowhere.life.gov.sg/</a:t>
+            </a:r>
+            <a:r>
+              <a:rPr lang="en-GB" sz="1100" b="1" dirty="0">
+                <a:solidFill>
+                  <a:srgbClr val="A00000"/>
+                </a:solidFill>
+              </a:rPr>
+              <a:t>) are </a:t>
+            </a:r>
+            <a:r>
+              <a:rPr kumimoji="0" lang="en-GB" sz="1100" b="1" i="0" u="none" strike="noStrike" kern="1200" cap="none" spc="0" normalizeH="0" baseline="0" noProof="0" dirty="0">
+                <a:ln>
+                  <a:noFill/>
+                </a:ln>
+                <a:solidFill>
+                  <a:srgbClr val="A00000"/>
+                </a:solidFill>
+                <a:effectLst/>
+                <a:uLnTx/>
+                <a:uFillTx/>
+                <a:latin typeface="Calibri"/>
+                <a:ea typeface="+mn-ea"/>
+                <a:cs typeface="+mn-cs"/>
+              </a:rPr>
+              <a:t>applicable/relevant for </a:t>
             </a:r>
             <a:r>
               <a:rPr kumimoji="0" sz="1100" b="1" i="0" u="none" strike="noStrike" kern="1200" cap="none" spc="0" normalizeH="0" baseline="0" noProof="0" dirty="0">
@@ -7519,7 +10656,7 @@
                 <a:ea typeface="+mn-ea"/>
                 <a:cs typeface="+mn-cs"/>
               </a:rPr>
-              <a:t> &amp; community resources can help each client's unique needs.</a:t>
+              <a:t>each client's unique needs.</a:t>
             </a:r>
           </a:p>
           <a:p>
@@ -13047,4 +16184,299 @@
   </a:objectDefaults>
   <a:extraClrSchemeLst/>
 </a:theme>
+</file>
+
+<file path=ppt/theme/theme2.xml><?xml version="1.0" encoding="utf-8"?>
+<a:theme xmlns:a="http://schemas.openxmlformats.org/drawingml/2006/main" name="Office Theme">
+  <a:themeElements>
+    <a:clrScheme name="Office">
+      <a:dk1>
+        <a:sysClr val="windowText" lastClr="000000"/>
+      </a:dk1>
+      <a:lt1>
+        <a:sysClr val="window" lastClr="FFFFFF"/>
+      </a:lt1>
+      <a:dk2>
+        <a:srgbClr val="44546A"/>
+      </a:dk2>
+      <a:lt2>
+        <a:srgbClr val="E7E6E6"/>
+      </a:lt2>
+      <a:accent1>
+        <a:srgbClr val="4472C4"/>
+      </a:accent1>
+      <a:accent2>
+        <a:srgbClr val="ED7D31"/>
+      </a:accent2>
+      <a:accent3>
+        <a:srgbClr val="A5A5A5"/>
+      </a:accent3>
+      <a:accent4>
+        <a:srgbClr val="FFC000"/>
+      </a:accent4>
+      <a:accent5>
+        <a:srgbClr val="5B9BD5"/>
+      </a:accent5>
+      <a:accent6>
+        <a:srgbClr val="70AD47"/>
+      </a:accent6>
+      <a:hlink>
+        <a:srgbClr val="0563C1"/>
+      </a:hlink>
+      <a:folHlink>
+        <a:srgbClr val="954F72"/>
+      </a:folHlink>
+    </a:clrScheme>
+    <a:fontScheme name="Office">
+      <a:majorFont>
+        <a:latin typeface="Calibri Light" panose="020F0302020204030204"/>
+        <a:ea typeface=""/>
+        <a:cs typeface=""/>
+        <a:font script="Jpan" typeface="游ゴシック Light"/>
+        <a:font script="Hang" typeface="맑은 고딕"/>
+        <a:font script="Hans" typeface="等线 Light"/>
+        <a:font script="Hant" typeface="新細明體"/>
+        <a:font script="Arab" typeface="Times New Roman"/>
+        <a:font script="Hebr" typeface="Times New Roman"/>
+        <a:font script="Thai" typeface="Angsana New"/>
+        <a:font script="Ethi" typeface="Nyala"/>
+        <a:font script="Beng" typeface="Vrinda"/>
+        <a:font script="Gujr" typeface="Shruti"/>
+        <a:font script="Khmr" typeface="MoolBoran"/>
+        <a:font script="Knda" typeface="Tunga"/>
+        <a:font script="Guru" typeface="Raavi"/>
+        <a:font script="Cans" typeface="Euphemia"/>
+        <a:font script="Cher" typeface="Plantagenet Cherokee"/>
+        <a:font script="Yiii" typeface="Microsoft Yi Baiti"/>
+        <a:font script="Tibt" typeface="Microsoft Himalaya"/>
+        <a:font script="Thaa" typeface="MV Boli"/>
+        <a:font script="Deva" typeface="Mangal"/>
+        <a:font script="Telu" typeface="Gautami"/>
+        <a:font script="Taml" typeface="Latha"/>
+        <a:font script="Syrc" typeface="Estrangelo Edessa"/>
+        <a:font script="Orya" typeface="Kalinga"/>
+        <a:font script="Mlym" typeface="Kartika"/>
+        <a:font script="Laoo" typeface="DokChampa"/>
+        <a:font script="Sinh" typeface="Iskoola Pota"/>
+        <a:font script="Mong" typeface="Mongolian Baiti"/>
+        <a:font script="Viet" typeface="Times New Roman"/>
+        <a:font script="Uigh" typeface="Microsoft Uighur"/>
+        <a:font script="Geor" typeface="Sylfaen"/>
+        <a:font script="Armn" typeface="Arial"/>
+        <a:font script="Bugi" typeface="Leelawadee UI"/>
+        <a:font script="Bopo" typeface="Microsoft JhengHei"/>
+        <a:font script="Java" typeface="Javanese Text"/>
+        <a:font script="Lisu" typeface="Segoe UI"/>
+        <a:font script="Mymr" typeface="Myanmar Text"/>
+        <a:font script="Nkoo" typeface="Ebrima"/>
+        <a:font script="Olck" typeface="Nirmala UI"/>
+        <a:font script="Osma" typeface="Ebrima"/>
+        <a:font script="Phag" typeface="Phagspa"/>
+        <a:font script="Syrn" typeface="Estrangelo Edessa"/>
+        <a:font script="Syrj" typeface="Estrangelo Edessa"/>
+        <a:font script="Syre" typeface="Estrangelo Edessa"/>
+        <a:font script="Sora" typeface="Nirmala UI"/>
+        <a:font script="Tale" typeface="Microsoft Tai Le"/>
+        <a:font script="Talu" typeface="Microsoft New Tai Lue"/>
+        <a:font script="Tfng" typeface="Ebrima"/>
+      </a:majorFont>
+      <a:minorFont>
+        <a:latin typeface="Calibri" panose="020F0502020204030204"/>
+        <a:ea typeface=""/>
+        <a:cs typeface=""/>
+        <a:font script="Jpan" typeface="游ゴシック"/>
+        <a:font script="Hang" typeface="맑은 고딕"/>
+        <a:font script="Hans" typeface="等线"/>
+        <a:font script="Hant" typeface="新細明體"/>
+        <a:font script="Arab" typeface="Arial"/>
+        <a:font script="Hebr" typeface="Arial"/>
+        <a:font script="Thai" typeface="Cordia New"/>
+        <a:font script="Ethi" typeface="Nyala"/>
+        <a:font script="Beng" typeface="Vrinda"/>
+        <a:font script="Gujr" typeface="Shruti"/>
+        <a:font script="Khmr" typeface="DaunPenh"/>
+        <a:font script="Knda" typeface="Tunga"/>
+        <a:font script="Guru" typeface="Raavi"/>
+        <a:font script="Cans" typeface="Euphemia"/>
+        <a:font script="Cher" typeface="Plantagenet Cherokee"/>
+        <a:font script="Yiii" typeface="Microsoft Yi Baiti"/>
+        <a:font script="Tibt" typeface="Microsoft Himalaya"/>
+        <a:font script="Thaa" typeface="MV Boli"/>
+        <a:font script="Deva" typeface="Mangal"/>
+        <a:font script="Telu" typeface="Gautami"/>
+        <a:font script="Taml" typeface="Latha"/>
+        <a:font script="Syrc" typeface="Estrangelo Edessa"/>
+        <a:font script="Orya" typeface="Kalinga"/>
+        <a:font script="Mlym" typeface="Kartika"/>
+        <a:font script="Laoo" typeface="DokChampa"/>
+        <a:font script="Sinh" typeface="Iskoola Pota"/>
+        <a:font script="Mong" typeface="Mongolian Baiti"/>
+        <a:font script="Viet" typeface="Arial"/>
+        <a:font script="Uigh" typeface="Microsoft Uighur"/>
+        <a:font script="Geor" typeface="Sylfaen"/>
+        <a:font script="Armn" typeface="Arial"/>
+        <a:font script="Bugi" typeface="Leelawadee UI"/>
+        <a:font script="Bopo" typeface="Microsoft JhengHei"/>
+        <a:font script="Java" typeface="Javanese Text"/>
+        <a:font script="Lisu" typeface="Segoe UI"/>
+        <a:font script="Mymr" typeface="Myanmar Text"/>
+        <a:font script="Nkoo" typeface="Ebrima"/>
+        <a:font script="Olck" typeface="Nirmala UI"/>
+        <a:font script="Osma" typeface="Ebrima"/>
+        <a:font script="Phag" typeface="Phagspa"/>
+        <a:font script="Syrn" typeface="Estrangelo Edessa"/>
+        <a:font script="Syrj" typeface="Estrangelo Edessa"/>
+        <a:font script="Syre" typeface="Estrangelo Edessa"/>
+        <a:font script="Sora" typeface="Nirmala UI"/>
+        <a:font script="Tale" typeface="Microsoft Tai Le"/>
+        <a:font script="Talu" typeface="Microsoft New Tai Lue"/>
+        <a:font script="Tfng" typeface="Ebrima"/>
+      </a:minorFont>
+    </a:fontScheme>
+    <a:fmtScheme name="Office">
+      <a:fillStyleLst>
+        <a:solidFill>
+          <a:schemeClr val="phClr"/>
+        </a:solidFill>
+        <a:gradFill rotWithShape="1">
+          <a:gsLst>
+            <a:gs pos="0">
+              <a:schemeClr val="phClr">
+                <a:lumMod val="110000"/>
+                <a:satMod val="105000"/>
+                <a:tint val="67000"/>
+              </a:schemeClr>
+            </a:gs>
+            <a:gs pos="50000">
+              <a:schemeClr val="phClr">
+                <a:lumMod val="105000"/>
+                <a:satMod val="103000"/>
+                <a:tint val="73000"/>
+              </a:schemeClr>
+            </a:gs>
+            <a:gs pos="100000">
+              <a:schemeClr val="phClr">
+                <a:lumMod val="105000"/>
+                <a:satMod val="109000"/>
+                <a:tint val="81000"/>
+              </a:schemeClr>
+            </a:gs>
+          </a:gsLst>
+          <a:lin ang="5400000" scaled="0"/>
+        </a:gradFill>
+        <a:gradFill rotWithShape="1">
+          <a:gsLst>
+            <a:gs pos="0">
+              <a:schemeClr val="phClr">
+                <a:satMod val="103000"/>
+                <a:lumMod val="102000"/>
+                <a:tint val="94000"/>
+              </a:schemeClr>
+            </a:gs>
+            <a:gs pos="50000">
+              <a:schemeClr val="phClr">
+                <a:satMod val="110000"/>
+                <a:lumMod val="100000"/>
+                <a:shade val="100000"/>
+              </a:schemeClr>
+            </a:gs>
+            <a:gs pos="100000">
+              <a:schemeClr val="phClr">
+                <a:lumMod val="99000"/>
+                <a:satMod val="120000"/>
+                <a:shade val="78000"/>
+              </a:schemeClr>
+            </a:gs>
+          </a:gsLst>
+          <a:lin ang="5400000" scaled="0"/>
+        </a:gradFill>
+      </a:fillStyleLst>
+      <a:lnStyleLst>
+        <a:ln w="6350" cap="flat" cmpd="sng" algn="ctr">
+          <a:solidFill>
+            <a:schemeClr val="phClr"/>
+          </a:solidFill>
+          <a:prstDash val="solid"/>
+          <a:miter lim="800000"/>
+        </a:ln>
+        <a:ln w="12700" cap="flat" cmpd="sng" algn="ctr">
+          <a:solidFill>
+            <a:schemeClr val="phClr"/>
+          </a:solidFill>
+          <a:prstDash val="solid"/>
+          <a:miter lim="800000"/>
+        </a:ln>
+        <a:ln w="19050" cap="flat" cmpd="sng" algn="ctr">
+          <a:solidFill>
+            <a:schemeClr val="phClr"/>
+          </a:solidFill>
+          <a:prstDash val="solid"/>
+          <a:miter lim="800000"/>
+        </a:ln>
+      </a:lnStyleLst>
+      <a:effectStyleLst>
+        <a:effectStyle>
+          <a:effectLst/>
+        </a:effectStyle>
+        <a:effectStyle>
+          <a:effectLst/>
+        </a:effectStyle>
+        <a:effectStyle>
+          <a:effectLst>
+            <a:outerShdw blurRad="57150" dist="19050" dir="5400000" algn="ctr" rotWithShape="0">
+              <a:srgbClr val="000000">
+                <a:alpha val="63000"/>
+              </a:srgbClr>
+            </a:outerShdw>
+          </a:effectLst>
+        </a:effectStyle>
+      </a:effectStyleLst>
+      <a:bgFillStyleLst>
+        <a:solidFill>
+          <a:schemeClr val="phClr"/>
+        </a:solidFill>
+        <a:solidFill>
+          <a:schemeClr val="phClr">
+            <a:tint val="95000"/>
+            <a:satMod val="170000"/>
+          </a:schemeClr>
+        </a:solidFill>
+        <a:gradFill rotWithShape="1">
+          <a:gsLst>
+            <a:gs pos="0">
+              <a:schemeClr val="phClr">
+                <a:tint val="93000"/>
+                <a:satMod val="150000"/>
+                <a:shade val="98000"/>
+                <a:lumMod val="102000"/>
+              </a:schemeClr>
+            </a:gs>
+            <a:gs pos="50000">
+              <a:schemeClr val="phClr">
+                <a:tint val="98000"/>
+                <a:satMod val="130000"/>
+                <a:shade val="90000"/>
+                <a:lumMod val="103000"/>
+              </a:schemeClr>
+            </a:gs>
+            <a:gs pos="100000">
+              <a:schemeClr val="phClr">
+                <a:shade val="63000"/>
+                <a:satMod val="120000"/>
+              </a:schemeClr>
+            </a:gs>
+          </a:gsLst>
+          <a:lin ang="5400000" scaled="0"/>
+        </a:gradFill>
+      </a:bgFillStyleLst>
+    </a:fmtScheme>
+  </a:themeElements>
+  <a:objectDefaults/>
+  <a:extraClrSchemeLst/>
+  <a:extLst>
+    <a:ext uri="{05A4C25C-085E-4340-85A3-A5531E510DB2}">
+      <thm15:themeFamily xmlns:thm15="http://schemas.microsoft.com/office/thememl/2012/main" name="Office Theme" id="{62F939B6-93AF-4DB8-9C6B-D6C7DFDC589F}" vid="{4A3C46E8-61CC-4603-A589-7422A47A8E4A}"/>
+    </a:ext>
+  </a:extLst>
+</a:theme>
 </file>